--- a/downloads/DCT_V2_Ch09_Slides.pptx
+++ b/downloads/DCT_V2_Ch09_Slides.pptx
@@ -28,9 +28,10 @@
     <p:sldId id="276" r:id="rId22"/>
     <p:sldId id="277" r:id="rId23"/>
     <p:sldId id="278" r:id="rId24"/>
+    <p:sldId id="279" r:id="rId25"/>
   </p:sldIdLst>
   <p:notesMasterIdLst>
-    <p:notesMasterId r:id="rId25"/>
+    <p:notesMasterId r:id="rId26"/>
   </p:notesMasterIdLst>
   <p:sldSz cx="12192000" cy="6858000"/>
   <p:notesSz cx="6858000" cy="12192000"/>
@@ -129,7 +130,7 @@
   <p:extLst>
     <p:ext uri="{521415D9-36F7-43E2-AB2F-B90AF26B5E84}">
       <p14:sectionLst xmlns:p14="http://schemas.microsoft.com/office/powerpoint/2010/main">
-        <p14:section name="Opening" id="{1a36709c-51fc-4298-078c-0d8f1b843770}">
+        <p14:section name="Opening" id="{f412b4a9-4807-a804-2d37-4e7e4e395271}">
           <p14:sldIdLst>
             <p14:sldId id="256"/>
             <p14:sldId id="257"/>
@@ -137,41 +138,41 @@
             <p14:sldId id="259"/>
           </p14:sldIdLst>
         </p14:section>
-        <p14:section name="9.1 From One Future to a Declared Law" id="{7fdbcf3b-703f-0cf7-6d1e-d76ee3facedd}">
+        <p14:section name="9.1 From One Future to a Declared Law" id="{8fcaa584-0810-65c4-1946-446fb23525ad}">
           <p14:sldIdLst>
             <p14:sldId id="260"/>
             <p14:sldId id="261"/>
           </p14:sldIdLst>
         </p14:section>
-        <p14:section name="9.2 The Stochastic HJB Equation" id="{cf177be7-1bf6-61ea-cbfb-fc20c8c40c22}">
+        <p14:section name="9.2 The Stochastic HJB Equation" id="{e760ff82-7633-0977-de77-e796924456e4}">
           <p14:sldIdLst>
             <p14:sldId id="262"/>
           </p14:sldIdLst>
         </p14:section>
-        <p14:section name="9.3 What Outside Events Change in a Rule" id="{ef85ca1b-4006-8a13-3b23-2471c10a609c}">
+        <p14:section name="9.3 What Outside Events Change in a Rule" id="{8827b8f5-154e-75b5-50b3-49d5d8fc89a9}">
           <p14:sldIdLst>
             <p14:sldId id="263"/>
             <p14:sldId id="264"/>
           </p14:sldIdLst>
         </p14:section>
-        <p14:section name="9.4 Commitments Kept with a Stated Probability" id="{2621b6f6-dd6b-816c-a44f-9caef21d731d}">
+        <p14:section name="9.4 Commitments Kept with a Stated Probability" id="{93591e7e-9f89-71fc-75c6-92aad1f931b5}">
           <p14:sldIdLst>
             <p14:sldId id="265"/>
             <p14:sldId id="266"/>
           </p14:sldIdLst>
         </p14:section>
-        <p14:section name="9.5 Rules, Recourse, and the Value of Information" id="{879cbd53-ffce-817f-2dd8-68dd6089ec73}">
+        <p14:section name="9.5 Rules, Recourse, and the Value of Information" id="{6516d4f2-0740-d65d-b673-b95abe49d3b4}">
           <p14:sldIdLst>
             <p14:sldId id="267"/>
           </p14:sldIdLst>
         </p14:section>
-        <p14:section name="9.6 Computing with Samples" id="{bfea826f-4270-6466-7b08-edd74656ce2e}">
+        <p14:section name="9.6 Computing with Samples" id="{d717ddc8-9d74-255e-93e8-14ca387403bc}">
           <p14:sldIdLst>
             <p14:sldId id="268"/>
             <p14:sldId id="269"/>
           </p14:sldIdLst>
         </p14:section>
-        <p14:section name="Worked Example 9.1" id="{feb31fae-23dd-8ba3-635f-07d550405ce4}">
+        <p14:section name="Worked Example 9.1" id="{67e17a17-ba3c-4602-6f24-98077425c16f}">
           <p14:sldIdLst>
             <p14:sldId id="270"/>
             <p14:sldId id="271"/>
@@ -180,16 +181,21 @@
             <p14:sldId id="274"/>
           </p14:sldIdLst>
         </p14:section>
-        <p14:section name="AXIOM Lab 2.9" id="{e4674cd2-1449-c5f1-1e24-359de8b4033d}">
+        <p14:section name="In Practice" id="{28b64a16-7634-fdd5-b4b1-2b068892e388}">
           <p14:sldIdLst>
             <p14:sldId id="275"/>
           </p14:sldIdLst>
         </p14:section>
-        <p14:section name="Close" id="{71b4023e-e77e-f768-d9d0-271b2fc82024}">
+        <p14:section name="AXIOM Lab 2.9" id="{85d97e1e-a09c-cbd8-d641-45391b1ec2b4}">
           <p14:sldIdLst>
             <p14:sldId id="276"/>
+          </p14:sldIdLst>
+        </p14:section>
+        <p14:section name="Close" id="{155e399a-6217-6b7f-7c8a-11e24cad1a46}">
+          <p14:sldIdLst>
             <p14:sldId id="277"/>
             <p14:sldId id="278"/>
+            <p14:sldId id="279"/>
           </p14:sldIdLst>
         </p14:section>
       </p14:sectionLst>
@@ -1652,7 +1658,7 @@
           <a:p>
             <a:r>
               <a:rPr lang="en-US" dirty="0"/>
-              <a:t>AXIOM Lab 2.9. What to look for: chances under 1 percent in every quarter when the program-wide chance is 5 percent; designs that look safe on their own 1,000 paths and fail on fresh ones; a rule that saves little because cash reveals trouble late, and a warning worth $4.1 million; a gain that stays at 4.34 a year with departures and falls to 4.16 with an uncertain yield; a value ledger with no drift.</a:t>
+              <a:t>In Practice, Chapter 9: Brazil Prices the Water in Its Reservoirs. A real organization's decision of this chapter's kind, told from its published record; every figure is cited in the book. The lesson for Meridian: A 5 percent annual chance of a deficit of any depth counted how often, not how deep: CVaR weighs the bad paths. Sources: Pereira and Pinto (1991); Terry et al. (1986), Interfaces; CCEE; ONS; the 2001 Kelman Commission report; Shapiro et al. (2013).</a:t>
             </a:r>
             <a:endParaRPr lang="en-US" dirty="0"/>
           </a:p>
@@ -1740,7 +1746,7 @@
           <a:p>
             <a:r>
               <a:rPr lang="en-US" dirty="0"/>
-              <a:t>Key Takeaways, Chapter 9.</a:t>
+              <a:t>AXIOM Lab 2.9. What to look for: chances under 1 percent in every quarter when the program-wide chance is 5 percent; designs that look safe on their own 1,000 paths and fail on fresh ones; a rule that saves little because cash reveals trouble late, and a warning worth $4.1 million; a gain that stays at 4.34 a year with departures and falls to 4.16 with an uncertain yield; a value ledger with no drift.</a:t>
             </a:r>
             <a:endParaRPr lang="en-US" dirty="0"/>
           </a:p>
@@ -1828,7 +1834,7 @@
           <a:p>
             <a:r>
               <a:rPr lang="en-US" dirty="0"/>
-              <a:t>The notebook and workbook are on the course website, www.dynamiccorporatetransformation.com.</a:t>
+              <a:t>Key Takeaways, Chapter 9.</a:t>
             </a:r>
             <a:endParaRPr lang="en-US" dirty="0"/>
           </a:p>
@@ -1916,7 +1922,7 @@
           <a:p>
             <a:r>
               <a:rPr lang="en-US" dirty="0"/>
-              <a:t>The Scope and Limits box of Section 9.1 and Proposition 9.1's Enterprise Interpretation point ahead to Chapters 10 and 11, the other two declarations of Part III, Enterprise Optimization Under Uncertainty.</a:t>
+              <a:t>The notebook and workbook are on the course website, www.dynamiccorporatetransformation.com.</a:t>
             </a:r>
             <a:endParaRPr lang="en-US" dirty="0"/>
           </a:p>
@@ -1940,6 +1946,94 @@
             <a:fld id="{F7021451-1387-4CA6-816F-3879F97B5CBC}" type="slidenum">
               <a:rPr lang="en-US"/>
               <a:t>23</a:t>
+            </a:fld>
+            <a:endParaRPr lang="en-US"/>
+          </a:p>
+        </p:txBody>
+      </p:sp>
+    </p:spTree>
+    <p:extLst>
+      <p:ext uri="{BB962C8B-B14F-4D97-AF65-F5344CB8AC3E}">
+        <p14:creationId xmlns:p14="http://schemas.microsoft.com/office/powerpoint/2010/main" val="1024086991"/>
+      </p:ext>
+    </p:extLst>
+  </p:cSld>
+  <p:clrMapOvr>
+    <a:masterClrMapping/>
+  </p:clrMapOvr>
+</p:notes>
+</file>
+
+<file path=ppt/notesSlides/notesSlide24.xml><?xml version="1.0" encoding="utf-8"?>
+<p:notes xmlns:a="http://schemas.openxmlformats.org/drawingml/2006/main" xmlns:r="http://schemas.openxmlformats.org/officeDocument/2006/relationships" xmlns:p="http://schemas.openxmlformats.org/presentationml/2006/main">
+  <p:cSld>
+    <p:spTree>
+      <p:nvGrpSpPr>
+        <p:cNvPr id="1" name=""/>
+        <p:cNvGrpSpPr/>
+        <p:nvPr/>
+      </p:nvGrpSpPr>
+      <p:grpSpPr>
+        <a:xfrm>
+          <a:off x="0" y="0"/>
+          <a:ext cx="0" cy="0"/>
+          <a:chOff x="0" y="0"/>
+          <a:chExt cx="0" cy="0"/>
+        </a:xfrm>
+      </p:grpSpPr>
+      <p:sp>
+        <p:nvSpPr>
+          <p:cNvPr id="2" name="Slide Image Placeholder 1"/>
+          <p:cNvSpPr>
+            <a:spLocks noGrp="1" noRot="1" noChangeAspect="1"/>
+          </p:cNvSpPr>
+          <p:nvPr>
+            <p:ph type="sldImg"/>
+          </p:nvPr>
+        </p:nvSpPr>
+        <p:spPr/>
+      </p:sp>
+      <p:sp>
+        <p:nvSpPr>
+          <p:cNvPr id="3" name="Notes Placeholder 2"/>
+          <p:cNvSpPr>
+            <a:spLocks noGrp="1"/>
+          </p:cNvSpPr>
+          <p:nvPr>
+            <p:ph type="body" idx="1"/>
+          </p:nvPr>
+        </p:nvSpPr>
+        <p:spPr/>
+        <p:txBody>
+          <a:bodyPr/>
+          <a:lstStyle/>
+          <a:p>
+            <a:r>
+              <a:rPr lang="en-US" dirty="0"/>
+              <a:t>The Scope and Limits box of Section 9.1 and Proposition 9.1's Enterprise Interpretation point ahead to Chapters 10 and 11, the other two declarations of Part III, Enterprise Optimization Under Uncertainty.</a:t>
+            </a:r>
+            <a:endParaRPr lang="en-US" dirty="0"/>
+          </a:p>
+        </p:txBody>
+      </p:sp>
+      <p:sp>
+        <p:nvSpPr>
+          <p:cNvPr id="4" name="Slide Number Placeholder 3"/>
+          <p:cNvSpPr>
+            <a:spLocks noGrp="1"/>
+          </p:cNvSpPr>
+          <p:nvPr>
+            <p:ph type="sldNum" sz="quarter" idx="10"/>
+          </p:nvPr>
+        </p:nvSpPr>
+        <p:spPr/>
+        <p:txBody>
+          <a:bodyPr/>
+          <a:lstStyle/>
+          <a:p>
+            <a:fld id="{F7021451-1387-4CA6-816F-3879F97B5CBC}" type="slidenum">
+              <a:rPr lang="en-US"/>
+              <a:t>24</a:t>
             </a:fld>
             <a:endParaRPr lang="en-US"/>
           </a:p>
@@ -14760,7 +14854,7 @@
                   <a:schemeClr val="accent1"/>
                 </a:solidFill>
               </a:rPr>
-              <a:t>AXIOM LAB 2.9 · MODULE AXIOM-09</a:t>
+              <a:t>IN PRACTICE · BRAZIL'S HYDRO SYSTEM</a:t>
             </a:r>
             <a:endParaRPr lang="en-US" sz="1200" dirty="0"/>
           </a:p>
@@ -14801,804 +14895,26 @@
                 <a:ea typeface="Cambria" pitchFamily="34" charset="-122"/>
                 <a:cs typeface="Cambria" pitchFamily="34" charset="-120"/>
               </a:rPr>
-              <a:t>Keeping Meridian's appetite, in AXIOM</a:t>
+              <a:t>Brazil prices the water in its reservoirs</a:t>
             </a:r>
             <a:endParaRPr lang="en-US" sz="3200" dirty="0"/>
           </a:p>
         </p:txBody>
       </p:sp>
-      <p:pic>
-        <p:nvPicPr>
-          <p:cNvPr id="5" name="AXIOM logo" descr="AXIOM">    </p:cNvPr>
-          <p:cNvPicPr>
-            <a:picLocks noChangeAspect="1"/>
-          </p:cNvPicPr>
-          <p:nvPr/>
-        </p:nvPicPr>
-        <p:blipFill>
-          <a:blip r:embed="rId1"/>
-          <a:stretch>
-            <a:fillRect/>
-          </a:stretch>
-        </p:blipFill>
-        <p:spPr>
-          <a:xfrm>
-            <a:off x="9539935" y="310896"/>
-            <a:ext cx="2103120" cy="420624"/>
-          </a:xfrm>
-          <a:prstGeom prst="rect">
-            <a:avLst/>
-          </a:prstGeom>
-        </p:spPr>
-      </p:pic>
-      <p:sp>
-        <p:nvSpPr>
-          <p:cNvPr id="6" name="Situation"/>
-          <p:cNvSpPr txBox="1"/>
-          <p:nvPr/>
-        </p:nvSpPr>
-        <p:spPr>
-          <a:xfrm>
-            <a:off x="548640" y="1645920"/>
-            <a:ext cx="11094415" cy="777240"/>
-          </a:xfrm>
-          <a:prstGeom prst="rect">
-            <a:avLst/>
-          </a:prstGeom>
-          <a:noFill/>
-          <a:ln/>
-        </p:spPr>
-        <p:txBody>
-          <a:bodyPr wrap="square" lIns="0" tIns="0" rIns="0" bIns="0" rtlCol="0" anchor="t"/>
-          <a:lstStyle/>
-          <a:p>
-            <a:pPr indent="0" marL="0">
-              <a:buNone/>
-            </a:pPr>
-            <a:r>
-              <a:rPr lang="en-US" sz="1500" dirty="0">
-                <a:solidFill>
-                  <a:schemeClr val="tx1"/>
-                </a:solidFill>
-              </a:rPr>
-              <a:t>The board wants the cheapest way to keep its appetite, checked on paths the design has not seen. Open AXIOM, choose Lab 2.9 and load the Meridian liquidity instance (Volume I, Chapter 8's law) and the hiring instance with HR's record.</a:t>
-            </a:r>
-            <a:endParaRPr lang="en-US" sz="1500" dirty="0"/>
-          </a:p>
-        </p:txBody>
-      </p:sp>
-      <p:sp>
-        <p:nvSpPr>
-          <p:cNvPr id="7" name="Flow line"/>
+      <p:sp>
+        <p:nvSpPr>
+          <p:cNvPr id="5" name="Card"/>
           <p:cNvSpPr/>
           <p:nvPr/>
         </p:nvSpPr>
         <p:spPr>
           <a:xfrm>
-            <a:off x="1658082" y="2880360"/>
-            <a:ext cx="8875532" cy="0"/>
-          </a:xfrm>
-          <a:prstGeom prst="line">
-            <a:avLst/>
-          </a:prstGeom>
-          <a:noFill/>
-          <a:ln w="25400">
-            <a:solidFill>
-              <a:srgbClr val="C4CBD8"/>
-            </a:solidFill>
-            <a:prstDash val="solid"/>
-          </a:ln>
-        </p:spPr>
-      </p:sp>
-      <p:sp>
-        <p:nvSpPr>
-          <p:cNvPr id="8" name="Number"/>
-          <p:cNvSpPr/>
-          <p:nvPr/>
-        </p:nvSpPr>
-        <p:spPr>
-          <a:xfrm>
-            <a:off x="1383762" y="2606040"/>
-            <a:ext cx="548640" cy="548640"/>
-          </a:xfrm>
-          <a:prstGeom prst="ellipse">
-            <a:avLst/>
-          </a:prstGeom>
-          <a:solidFill>
-            <a:schemeClr val="accent1"/>
-          </a:solidFill>
-          <a:ln w="6350">
-            <a:solidFill>
-              <a:schemeClr val="accent1"/>
-            </a:solidFill>
-            <a:prstDash val="solid"/>
-          </a:ln>
-        </p:spPr>
-      </p:sp>
-      <p:sp>
-        <p:nvSpPr>
-          <p:cNvPr id="9" name="Text 5"/>
-          <p:cNvSpPr txBox="1"/>
-          <p:nvPr/>
-        </p:nvSpPr>
-        <p:spPr>
-          <a:xfrm>
-            <a:off x="1383762" y="2606040"/>
-            <a:ext cx="548640" cy="548640"/>
-          </a:xfrm>
-          <a:prstGeom prst="rect">
-            <a:avLst/>
-          </a:prstGeom>
-          <a:noFill/>
-          <a:ln/>
-        </p:spPr>
-        <p:txBody>
-          <a:bodyPr wrap="square" lIns="0" tIns="0" rIns="0" bIns="0" rtlCol="0" anchor="ctr"/>
-          <a:lstStyle/>
-          <a:p>
-            <a:pPr algn="ctr" indent="0" marL="0">
-              <a:buNone/>
-            </a:pPr>
-            <a:r>
-              <a:rPr lang="en-US" sz="1600" b="1" dirty="0">
-                <a:solidFill>
-                  <a:schemeClr val="bg1"/>
-                </a:solidFill>
-                <a:latin typeface="Calibri" pitchFamily="34" charset="0"/>
-                <a:ea typeface="Calibri" pitchFamily="34" charset="-122"/>
-                <a:cs typeface="Calibri" pitchFamily="34" charset="-120"/>
-              </a:rPr>
-              <a:t>1</a:t>
-            </a:r>
-            <a:endParaRPr lang="en-US" sz="1600" dirty="0"/>
-          </a:p>
-        </p:txBody>
-      </p:sp>
-      <p:sp>
-        <p:nvSpPr>
-          <p:cNvPr id="10" name="Flow head"/>
-          <p:cNvSpPr txBox="1"/>
-          <p:nvPr/>
-        </p:nvSpPr>
-        <p:spPr>
-          <a:xfrm>
-            <a:off x="621792" y="3291840"/>
-            <a:ext cx="2072579" cy="548640"/>
-          </a:xfrm>
-          <a:prstGeom prst="rect">
-            <a:avLst/>
-          </a:prstGeom>
-          <a:noFill/>
-          <a:ln/>
-        </p:spPr>
-        <p:txBody>
-          <a:bodyPr wrap="square" lIns="0" tIns="0" rIns="0" bIns="0" rtlCol="0" anchor="t"/>
-          <a:lstStyle/>
-          <a:p>
-            <a:pPr algn="ctr" indent="0" marL="0">
-              <a:buNone/>
-            </a:pPr>
-            <a:r>
-              <a:rPr lang="en-US" sz="1600" b="1" dirty="0">
-                <a:solidFill>
-                  <a:schemeClr val="tx1"/>
-                </a:solidFill>
-                <a:latin typeface="Cambria" pitchFamily="34" charset="0"/>
-                <a:ea typeface="Cambria" pitchFamily="34" charset="-122"/>
-                <a:cs typeface="Cambria" pitchFamily="34" charset="-120"/>
-              </a:rPr>
-              <a:t>Estimate and check</a:t>
-            </a:r>
-            <a:endParaRPr lang="en-US" sz="1600" dirty="0"/>
-          </a:p>
-        </p:txBody>
-      </p:sp>
-      <p:sp>
-        <p:nvSpPr>
-          <p:cNvPr id="11" name="Flow text"/>
-          <p:cNvSpPr txBox="1"/>
-          <p:nvPr/>
-        </p:nvSpPr>
-        <p:spPr>
-          <a:xfrm>
-            <a:off x="640080" y="3867912"/>
-            <a:ext cx="2036003" cy="1554480"/>
-          </a:xfrm>
-          <a:prstGeom prst="rect">
-            <a:avLst/>
-          </a:prstGeom>
-          <a:noFill/>
-          <a:ln/>
-        </p:spPr>
-        <p:txBody>
-          <a:bodyPr wrap="square" lIns="0" tIns="0" rIns="0" bIns="0" rtlCol="0" anchor="t"/>
-          <a:lstStyle/>
-          <a:p>
-            <a:pPr algn="ctr" indent="0" marL="0">
-              <a:buNone/>
-            </a:pPr>
-            <a:r>
-              <a:rPr lang="en-US" sz="1400" dirty="0">
-                <a:solidFill>
-                  <a:schemeClr val="tx2"/>
-                </a:solidFill>
-              </a:rPr>
-              <a:t>Chances by quarter and over the program, with standard errors.</a:t>
-            </a:r>
-            <a:endParaRPr lang="en-US" sz="1400" dirty="0"/>
-          </a:p>
-        </p:txBody>
-      </p:sp>
-      <p:sp>
-        <p:nvSpPr>
-          <p:cNvPr id="12" name="Number"/>
-          <p:cNvSpPr/>
-          <p:nvPr/>
-        </p:nvSpPr>
-        <p:spPr>
-          <a:xfrm>
-            <a:off x="3602645" y="2606040"/>
-            <a:ext cx="548640" cy="548640"/>
-          </a:xfrm>
-          <a:prstGeom prst="ellipse">
-            <a:avLst/>
-          </a:prstGeom>
-          <a:solidFill>
-            <a:schemeClr val="accent1"/>
-          </a:solidFill>
-          <a:ln w="6350">
-            <a:solidFill>
-              <a:schemeClr val="accent1"/>
-            </a:solidFill>
-            <a:prstDash val="solid"/>
-          </a:ln>
-        </p:spPr>
-      </p:sp>
-      <p:sp>
-        <p:nvSpPr>
-          <p:cNvPr id="13" name="Text 9"/>
-          <p:cNvSpPr txBox="1"/>
-          <p:nvPr/>
-        </p:nvSpPr>
-        <p:spPr>
-          <a:xfrm>
-            <a:off x="3602645" y="2606040"/>
-            <a:ext cx="548640" cy="548640"/>
-          </a:xfrm>
-          <a:prstGeom prst="rect">
-            <a:avLst/>
-          </a:prstGeom>
-          <a:noFill/>
-          <a:ln/>
-        </p:spPr>
-        <p:txBody>
-          <a:bodyPr wrap="square" lIns="0" tIns="0" rIns="0" bIns="0" rtlCol="0" anchor="ctr"/>
-          <a:lstStyle/>
-          <a:p>
-            <a:pPr algn="ctr" indent="0" marL="0">
-              <a:buNone/>
-            </a:pPr>
-            <a:r>
-              <a:rPr lang="en-US" sz="1600" b="1" dirty="0">
-                <a:solidFill>
-                  <a:schemeClr val="bg1"/>
-                </a:solidFill>
-                <a:latin typeface="Calibri" pitchFamily="34" charset="0"/>
-                <a:ea typeface="Calibri" pitchFamily="34" charset="-122"/>
-                <a:cs typeface="Calibri" pitchFamily="34" charset="-120"/>
-              </a:rPr>
-              <a:t>2</a:t>
-            </a:r>
-            <a:endParaRPr lang="en-US" sz="1600" dirty="0"/>
-          </a:p>
-        </p:txBody>
-      </p:sp>
-      <p:sp>
-        <p:nvSpPr>
-          <p:cNvPr id="14" name="Flow head"/>
-          <p:cNvSpPr txBox="1"/>
-          <p:nvPr/>
-        </p:nvSpPr>
-        <p:spPr>
-          <a:xfrm>
-            <a:off x="2840675" y="3291840"/>
-            <a:ext cx="2072579" cy="548640"/>
-          </a:xfrm>
-          <a:prstGeom prst="rect">
-            <a:avLst/>
-          </a:prstGeom>
-          <a:noFill/>
-          <a:ln/>
-        </p:spPr>
-        <p:txBody>
-          <a:bodyPr wrap="square" lIns="0" tIns="0" rIns="0" bIns="0" rtlCol="0" anchor="t"/>
-          <a:lstStyle/>
-          <a:p>
-            <a:pPr algn="ctr" indent="0" marL="0">
-              <a:buNone/>
-            </a:pPr>
-            <a:r>
-              <a:rPr lang="en-US" sz="1600" b="1" dirty="0">
-                <a:solidFill>
-                  <a:schemeClr val="tx1"/>
-                </a:solidFill>
-                <a:latin typeface="Cambria" pitchFamily="34" charset="0"/>
-                <a:ea typeface="Cambria" pitchFamily="34" charset="-122"/>
-                <a:cs typeface="Cambria" pitchFamily="34" charset="-120"/>
-              </a:rPr>
-              <a:t>Design on a sample</a:t>
-            </a:r>
-            <a:endParaRPr lang="en-US" sz="1600" dirty="0"/>
-          </a:p>
-        </p:txBody>
-      </p:sp>
-      <p:sp>
-        <p:nvSpPr>
-          <p:cNvPr id="15" name="Flow text"/>
-          <p:cNvSpPr txBox="1"/>
-          <p:nvPr/>
-        </p:nvSpPr>
-        <p:spPr>
-          <a:xfrm>
-            <a:off x="2858963" y="3867912"/>
-            <a:ext cx="2036003" cy="1554480"/>
-          </a:xfrm>
-          <a:prstGeom prst="rect">
-            <a:avLst/>
-          </a:prstGeom>
-          <a:noFill/>
-          <a:ln/>
-        </p:spPr>
-        <p:txBody>
-          <a:bodyPr wrap="square" lIns="0" tIns="0" rIns="0" bIns="0" rtlCol="0" anchor="t"/>
-          <a:lstStyle/>
-          <a:p>
-            <a:pPr algn="ctr" indent="0" marL="0">
-              <a:buNone/>
-            </a:pPr>
-            <a:r>
-              <a:rPr lang="en-US" sz="1400" dirty="0">
-                <a:solidFill>
-                  <a:schemeClr val="tx2"/>
-                </a:solidFill>
-              </a:rPr>
-              <a:t>The cheapest package on the book's paths; then on 1,000 and 10,000.</a:t>
-            </a:r>
-            <a:endParaRPr lang="en-US" sz="1400" dirty="0"/>
-          </a:p>
-        </p:txBody>
-      </p:sp>
-      <p:sp>
-        <p:nvSpPr>
-          <p:cNvPr id="16" name="Number"/>
-          <p:cNvSpPr/>
-          <p:nvPr/>
-        </p:nvSpPr>
-        <p:spPr>
-          <a:xfrm>
-            <a:off x="5821528" y="2606040"/>
-            <a:ext cx="548640" cy="548640"/>
-          </a:xfrm>
-          <a:prstGeom prst="ellipse">
-            <a:avLst/>
-          </a:prstGeom>
-          <a:solidFill>
-            <a:schemeClr val="accent1"/>
-          </a:solidFill>
-          <a:ln w="6350">
-            <a:solidFill>
-              <a:schemeClr val="accent1"/>
-            </a:solidFill>
-            <a:prstDash val="solid"/>
-          </a:ln>
-        </p:spPr>
-      </p:sp>
-      <p:sp>
-        <p:nvSpPr>
-          <p:cNvPr id="17" name="Text 13"/>
-          <p:cNvSpPr txBox="1"/>
-          <p:nvPr/>
-        </p:nvSpPr>
-        <p:spPr>
-          <a:xfrm>
-            <a:off x="5821528" y="2606040"/>
-            <a:ext cx="548640" cy="548640"/>
-          </a:xfrm>
-          <a:prstGeom prst="rect">
-            <a:avLst/>
-          </a:prstGeom>
-          <a:noFill/>
-          <a:ln/>
-        </p:spPr>
-        <p:txBody>
-          <a:bodyPr wrap="square" lIns="0" tIns="0" rIns="0" bIns="0" rtlCol="0" anchor="ctr"/>
-          <a:lstStyle/>
-          <a:p>
-            <a:pPr algn="ctr" indent="0" marL="0">
-              <a:buNone/>
-            </a:pPr>
-            <a:r>
-              <a:rPr lang="en-US" sz="1600" b="1" dirty="0">
-                <a:solidFill>
-                  <a:schemeClr val="bg1"/>
-                </a:solidFill>
-                <a:latin typeface="Calibri" pitchFamily="34" charset="0"/>
-                <a:ea typeface="Calibri" pitchFamily="34" charset="-122"/>
-                <a:cs typeface="Calibri" pitchFamily="34" charset="-120"/>
-              </a:rPr>
-              <a:t>3</a:t>
-            </a:r>
-            <a:endParaRPr lang="en-US" sz="1600" dirty="0"/>
-          </a:p>
-        </p:txBody>
-      </p:sp>
-      <p:sp>
-        <p:nvSpPr>
-          <p:cNvPr id="18" name="Flow head"/>
-          <p:cNvSpPr txBox="1"/>
-          <p:nvPr/>
-        </p:nvSpPr>
-        <p:spPr>
-          <a:xfrm>
-            <a:off x="5059558" y="3291840"/>
-            <a:ext cx="2072579" cy="548640"/>
-          </a:xfrm>
-          <a:prstGeom prst="rect">
-            <a:avLst/>
-          </a:prstGeom>
-          <a:noFill/>
-          <a:ln/>
-        </p:spPr>
-        <p:txBody>
-          <a:bodyPr wrap="square" lIns="0" tIns="0" rIns="0" bIns="0" rtlCol="0" anchor="t"/>
-          <a:lstStyle/>
-          <a:p>
-            <a:pPr algn="ctr" indent="0" marL="0">
-              <a:buNone/>
-            </a:pPr>
-            <a:r>
-              <a:rPr lang="en-US" sz="1600" b="1" dirty="0">
-                <a:solidFill>
-                  <a:schemeClr val="tx1"/>
-                </a:solidFill>
-                <a:latin typeface="Cambria" pitchFamily="34" charset="0"/>
-                <a:ea typeface="Cambria" pitchFamily="34" charset="-122"/>
-                <a:cs typeface="Cambria" pitchFamily="34" charset="-120"/>
-              </a:rPr>
-              <a:t>Compare rules</a:t>
-            </a:r>
-            <a:endParaRPr lang="en-US" sz="1600" dirty="0"/>
-          </a:p>
-        </p:txBody>
-      </p:sp>
-      <p:sp>
-        <p:nvSpPr>
-          <p:cNvPr id="19" name="Flow text"/>
-          <p:cNvSpPr txBox="1"/>
-          <p:nvPr/>
-        </p:nvSpPr>
-        <p:spPr>
-          <a:xfrm>
-            <a:off x="5077846" y="3867912"/>
-            <a:ext cx="2036003" cy="1554480"/>
-          </a:xfrm>
-          <a:prstGeom prst="rect">
-            <a:avLst/>
-          </a:prstGeom>
-          <a:noFill/>
-          <a:ln/>
-        </p:spPr>
-        <p:txBody>
-          <a:bodyPr wrap="square" lIns="0" tIns="0" rIns="0" bIns="0" rtlCol="0" anchor="t"/>
-          <a:lstStyle/>
-          <a:p>
-            <a:pPr algn="ctr" indent="0" marL="0">
-              <a:buNone/>
-            </a:pPr>
-            <a:r>
-              <a:rPr lang="en-US" sz="1400" dirty="0">
-                <a:solidFill>
-                  <a:schemeClr val="tx2"/>
-                </a:solidFill>
-              </a:rPr>
-              <a:t>Under common random numbers: the package against reading cash.</a:t>
-            </a:r>
-            <a:endParaRPr lang="en-US" sz="1400" dirty="0"/>
-          </a:p>
-        </p:txBody>
-      </p:sp>
-      <p:sp>
-        <p:nvSpPr>
-          <p:cNvPr id="20" name="Number"/>
-          <p:cNvSpPr/>
-          <p:nvPr/>
-        </p:nvSpPr>
-        <p:spPr>
-          <a:xfrm>
-            <a:off x="8040411" y="2606040"/>
-            <a:ext cx="548640" cy="548640"/>
-          </a:xfrm>
-          <a:prstGeom prst="ellipse">
-            <a:avLst/>
-          </a:prstGeom>
-          <a:solidFill>
-            <a:schemeClr val="accent1"/>
-          </a:solidFill>
-          <a:ln w="6350">
-            <a:solidFill>
-              <a:schemeClr val="accent1"/>
-            </a:solidFill>
-            <a:prstDash val="solid"/>
-          </a:ln>
-        </p:spPr>
-      </p:sp>
-      <p:sp>
-        <p:nvSpPr>
-          <p:cNvPr id="21" name="Text 17"/>
-          <p:cNvSpPr txBox="1"/>
-          <p:nvPr/>
-        </p:nvSpPr>
-        <p:spPr>
-          <a:xfrm>
-            <a:off x="8040411" y="2606040"/>
-            <a:ext cx="548640" cy="548640"/>
-          </a:xfrm>
-          <a:prstGeom prst="rect">
-            <a:avLst/>
-          </a:prstGeom>
-          <a:noFill/>
-          <a:ln/>
-        </p:spPr>
-        <p:txBody>
-          <a:bodyPr wrap="square" lIns="0" tIns="0" rIns="0" bIns="0" rtlCol="0" anchor="ctr"/>
-          <a:lstStyle/>
-          <a:p>
-            <a:pPr algn="ctr" indent="0" marL="0">
-              <a:buNone/>
-            </a:pPr>
-            <a:r>
-              <a:rPr lang="en-US" sz="1600" b="1" dirty="0">
-                <a:solidFill>
-                  <a:schemeClr val="bg1"/>
-                </a:solidFill>
-                <a:latin typeface="Calibri" pitchFamily="34" charset="0"/>
-                <a:ea typeface="Calibri" pitchFamily="34" charset="-122"/>
-                <a:cs typeface="Calibri" pitchFamily="34" charset="-120"/>
-              </a:rPr>
-              <a:t>4</a:t>
-            </a:r>
-            <a:endParaRPr lang="en-US" sz="1600" dirty="0"/>
-          </a:p>
-        </p:txBody>
-      </p:sp>
-      <p:sp>
-        <p:nvSpPr>
-          <p:cNvPr id="22" name="Flow head"/>
-          <p:cNvSpPr txBox="1"/>
-          <p:nvPr/>
-        </p:nvSpPr>
-        <p:spPr>
-          <a:xfrm>
-            <a:off x="7278441" y="3291840"/>
-            <a:ext cx="2072579" cy="548640"/>
-          </a:xfrm>
-          <a:prstGeom prst="rect">
-            <a:avLst/>
-          </a:prstGeom>
-          <a:noFill/>
-          <a:ln/>
-        </p:spPr>
-        <p:txBody>
-          <a:bodyPr wrap="square" lIns="0" tIns="0" rIns="0" bIns="0" rtlCol="0" anchor="t"/>
-          <a:lstStyle/>
-          <a:p>
-            <a:pPr algn="ctr" indent="0" marL="0">
-              <a:buNone/>
-            </a:pPr>
-            <a:r>
-              <a:rPr lang="en-US" sz="1600" b="1" dirty="0">
-                <a:solidFill>
-                  <a:schemeClr val="tx1"/>
-                </a:solidFill>
-                <a:latin typeface="Cambria" pitchFamily="34" charset="0"/>
-                <a:ea typeface="Cambria" pitchFamily="34" charset="-122"/>
-                <a:cs typeface="Cambria" pitchFamily="34" charset="-120"/>
-              </a:rPr>
-              <a:t>Price information</a:t>
-            </a:r>
-            <a:endParaRPr lang="en-US" sz="1600" dirty="0"/>
-          </a:p>
-        </p:txBody>
-      </p:sp>
-      <p:sp>
-        <p:nvSpPr>
-          <p:cNvPr id="23" name="Flow text"/>
-          <p:cNvSpPr txBox="1"/>
-          <p:nvPr/>
-        </p:nvSpPr>
-        <p:spPr>
-          <a:xfrm>
-            <a:off x="7296729" y="3867912"/>
-            <a:ext cx="2036003" cy="1554480"/>
-          </a:xfrm>
-          <a:prstGeom prst="rect">
-            <a:avLst/>
-          </a:prstGeom>
-          <a:noFill/>
-          <a:ln/>
-        </p:spPr>
-        <p:txBody>
-          <a:bodyPr wrap="square" lIns="0" tIns="0" rIns="0" bIns="0" rtlCol="0" anchor="t"/>
-          <a:lstStyle/>
-          <a:p>
-            <a:pPr algn="ctr" indent="0" marL="0">
-              <a:buNone/>
-            </a:pPr>
-            <a:r>
-              <a:rPr lang="en-US" sz="1400" dirty="0">
-                <a:solidFill>
-                  <a:schemeClr val="tx2"/>
-                </a:solidFill>
-              </a:rPr>
-              <a:t>The clairvoyant's bound and an early warning of closures.</a:t>
-            </a:r>
-            <a:endParaRPr lang="en-US" sz="1400" dirty="0"/>
-          </a:p>
-        </p:txBody>
-      </p:sp>
-      <p:sp>
-        <p:nvSpPr>
-          <p:cNvPr id="24" name="Number"/>
-          <p:cNvSpPr/>
-          <p:nvPr/>
-        </p:nvSpPr>
-        <p:spPr>
-          <a:xfrm>
-            <a:off x="10259294" y="2606040"/>
-            <a:ext cx="548640" cy="548640"/>
-          </a:xfrm>
-          <a:prstGeom prst="ellipse">
-            <a:avLst/>
-          </a:prstGeom>
-          <a:solidFill>
-            <a:schemeClr val="accent1"/>
-          </a:solidFill>
-          <a:ln w="6350">
-            <a:solidFill>
-              <a:schemeClr val="accent1"/>
-            </a:solidFill>
-            <a:prstDash val="solid"/>
-          </a:ln>
-        </p:spPr>
-      </p:sp>
-      <p:sp>
-        <p:nvSpPr>
-          <p:cNvPr id="25" name="Text 21"/>
-          <p:cNvSpPr txBox="1"/>
-          <p:nvPr/>
-        </p:nvSpPr>
-        <p:spPr>
-          <a:xfrm>
-            <a:off x="10259294" y="2606040"/>
-            <a:ext cx="548640" cy="548640"/>
-          </a:xfrm>
-          <a:prstGeom prst="rect">
-            <a:avLst/>
-          </a:prstGeom>
-          <a:noFill/>
-          <a:ln/>
-        </p:spPr>
-        <p:txBody>
-          <a:bodyPr wrap="square" lIns="0" tIns="0" rIns="0" bIns="0" rtlCol="0" anchor="ctr"/>
-          <a:lstStyle/>
-          <a:p>
-            <a:pPr algn="ctr" indent="0" marL="0">
-              <a:buNone/>
-            </a:pPr>
-            <a:r>
-              <a:rPr lang="en-US" sz="1600" b="1" dirty="0">
-                <a:solidFill>
-                  <a:schemeClr val="bg1"/>
-                </a:solidFill>
-                <a:latin typeface="Calibri" pitchFamily="34" charset="0"/>
-                <a:ea typeface="Calibri" pitchFamily="34" charset="-122"/>
-                <a:cs typeface="Calibri" pitchFamily="34" charset="-120"/>
-              </a:rPr>
-              <a:t>5</a:t>
-            </a:r>
-            <a:endParaRPr lang="en-US" sz="1600" dirty="0"/>
-          </a:p>
-        </p:txBody>
-      </p:sp>
-      <p:sp>
-        <p:nvSpPr>
-          <p:cNvPr id="26" name="Flow head"/>
-          <p:cNvSpPr txBox="1"/>
-          <p:nvPr/>
-        </p:nvSpPr>
-        <p:spPr>
-          <a:xfrm>
-            <a:off x="9497324" y="3291840"/>
-            <a:ext cx="2072579" cy="548640"/>
-          </a:xfrm>
-          <a:prstGeom prst="rect">
-            <a:avLst/>
-          </a:prstGeom>
-          <a:noFill/>
-          <a:ln/>
-        </p:spPr>
-        <p:txBody>
-          <a:bodyPr wrap="square" lIns="0" tIns="0" rIns="0" bIns="0" rtlCol="0" anchor="t"/>
-          <a:lstStyle/>
-          <a:p>
-            <a:pPr algn="ctr" indent="0" marL="0">
-              <a:buNone/>
-            </a:pPr>
-            <a:r>
-              <a:rPr lang="en-US" sz="1600" b="1" dirty="0">
-                <a:solidFill>
-                  <a:schemeClr val="tx1"/>
-                </a:solidFill>
-                <a:latin typeface="Cambria" pitchFamily="34" charset="0"/>
-                <a:ea typeface="Cambria" pitchFamily="34" charset="-122"/>
-                <a:cs typeface="Cambria" pitchFamily="34" charset="-120"/>
-              </a:rPr>
-              <a:t>Steer with outside events</a:t>
-            </a:r>
-            <a:endParaRPr lang="en-US" sz="1600" dirty="0"/>
-          </a:p>
-        </p:txBody>
-      </p:sp>
-      <p:sp>
-        <p:nvSpPr>
-          <p:cNvPr id="27" name="Flow text"/>
-          <p:cNvSpPr txBox="1"/>
-          <p:nvPr/>
-        </p:nvSpPr>
-        <p:spPr>
-          <a:xfrm>
-            <a:off x="9515612" y="3867912"/>
-            <a:ext cx="2036003" cy="1554480"/>
-          </a:xfrm>
-          <a:prstGeom prst="rect">
-            <a:avLst/>
-          </a:prstGeom>
-          <a:noFill/>
-          <a:ln/>
-        </p:spPr>
-        <p:txBody>
-          <a:bodyPr wrap="square" lIns="0" tIns="0" rIns="0" bIns="0" rtlCol="0" anchor="t"/>
-          <a:lstStyle/>
-          <a:p>
-            <a:pPr algn="ctr" indent="0" marL="0">
-              <a:buNone/>
-            </a:pPr>
-            <a:r>
-              <a:rPr lang="en-US" sz="1400" dirty="0">
-                <a:solidFill>
-                  <a:schemeClr val="tx2"/>
-                </a:solidFill>
-              </a:rPr>
-              <a:t>Departures and an uncertain yield; the martingale audit.</a:t>
-            </a:r>
-            <a:endParaRPr lang="en-US" sz="1400" dirty="0"/>
-          </a:p>
-        </p:txBody>
-      </p:sp>
-      <p:sp>
-        <p:nvSpPr>
-          <p:cNvPr id="28" name="Deliverable card"/>
-          <p:cNvSpPr/>
-          <p:nvPr/>
-        </p:nvSpPr>
-        <p:spPr>
-          <a:xfrm>
-            <a:off x="548640" y="5486400"/>
-            <a:ext cx="11094415" cy="685800"/>
+            <a:off x="548640" y="1691640"/>
+            <a:ext cx="3515258" cy="2103120"/>
           </a:xfrm>
           <a:prstGeom prst="roundRect">
             <a:avLst>
-              <a:gd name="adj" fmla="val 10667"/>
+              <a:gd name="adj" fmla="val 3478"/>
             </a:avLst>
           </a:prstGeom>
           <a:solidFill>
@@ -15614,14 +14930,14 @@
       </p:sp>
       <p:sp>
         <p:nvSpPr>
-          <p:cNvPr id="29" name="Deliverable"/>
+          <p:cNvPr id="6" name="Card label"/>
           <p:cNvSpPr txBox="1"/>
           <p:nvPr/>
         </p:nvSpPr>
         <p:spPr>
           <a:xfrm>
-            <a:off x="777240" y="5559552"/>
-            <a:ext cx="10637215" cy="539496"/>
+            <a:off x="731520" y="1819656"/>
+            <a:ext cx="3149498" cy="310896"/>
           </a:xfrm>
           <a:prstGeom prst="rect">
             <a:avLst/>
@@ -15637,22 +14953,779 @@
               <a:buNone/>
             </a:pPr>
             <a:r>
-              <a:rPr lang="en-US" sz="1400" b="1" dirty="0">
+              <a:rPr lang="en-US" sz="1300" b="1" dirty="0">
+                <a:solidFill>
+                  <a:schemeClr val="accent1"/>
+                </a:solidFill>
+              </a:rPr>
+              <a:t>The decision</a:t>
+            </a:r>
+            <a:endParaRPr lang="en-US" sz="1300" dirty="0"/>
+          </a:p>
+        </p:txBody>
+      </p:sp>
+      <p:sp>
+        <p:nvSpPr>
+          <p:cNvPr id="7" name="Card head"/>
+          <p:cNvSpPr txBox="1"/>
+          <p:nvPr/>
+        </p:nvSpPr>
+        <p:spPr>
+          <a:xfrm>
+            <a:off x="731520" y="2148840"/>
+            <a:ext cx="3149498" cy="576072"/>
+          </a:xfrm>
+          <a:prstGeom prst="rect">
+            <a:avLst/>
+          </a:prstGeom>
+          <a:noFill/>
+          <a:ln/>
+        </p:spPr>
+        <p:txBody>
+          <a:bodyPr wrap="square" lIns="0" tIns="0" rIns="0" bIns="0" rtlCol="0" anchor="t"/>
+          <a:lstStyle/>
+          <a:p>
+            <a:pPr indent="0" marL="0">
+              <a:buNone/>
+            </a:pPr>
+            <a:r>
+              <a:rPr lang="en-US" sz="1600" b="1" dirty="0">
                 <a:solidFill>
                   <a:schemeClr val="tx1"/>
                 </a:solidFill>
-              </a:rPr>
-              <a:t>Deliverable:</a:t>
-            </a:r>
-            <a:r>
-              <a:rPr lang="en-US" sz="1400" dirty="0">
+                <a:latin typeface="Cambria" pitchFamily="34" charset="0"/>
+                <a:ea typeface="Cambria" pitchFamily="34" charset="-122"/>
+                <a:cs typeface="Cambria" pitchFamily="34" charset="-120"/>
+              </a:rPr>
+              <a:t>Water now or water later</a:t>
+            </a:r>
+            <a:endParaRPr lang="en-US" sz="1600" dirty="0"/>
+          </a:p>
+        </p:txBody>
+      </p:sp>
+      <p:sp>
+        <p:nvSpPr>
+          <p:cNvPr id="8" name="Card text"/>
+          <p:cNvSpPr txBox="1"/>
+          <p:nvPr/>
+        </p:nvSpPr>
+        <p:spPr>
+          <a:xfrm>
+            <a:off x="731520" y="2798064"/>
+            <a:ext cx="3149498" cy="868680"/>
+          </a:xfrm>
+          <a:prstGeom prst="rect">
+            <a:avLst/>
+          </a:prstGeom>
+          <a:noFill/>
+          <a:ln/>
+        </p:spPr>
+        <p:txBody>
+          <a:bodyPr wrap="square" lIns="0" tIns="0" rIns="0" bIns="0" rtlCol="0" anchor="t"/>
+          <a:lstStyle/>
+          <a:p>
+            <a:pPr indent="0" marL="0">
+              <a:buNone/>
+            </a:pPr>
+            <a:r>
+              <a:rPr lang="en-US" sz="1300" dirty="0">
+                <a:solidFill>
+                  <a:schemeClr val="tx2"/>
+                </a:solidFill>
+              </a:rPr>
+              <a:t>Each month, week, and day: release water or burn fuel, in a system dominated by hydropower.</a:t>
+            </a:r>
+            <a:endParaRPr lang="en-US" sz="1300" dirty="0"/>
+          </a:p>
+        </p:txBody>
+      </p:sp>
+      <p:sp>
+        <p:nvSpPr>
+          <p:cNvPr id="9" name="Card"/>
+          <p:cNvSpPr/>
+          <p:nvPr/>
+        </p:nvSpPr>
+        <p:spPr>
+          <a:xfrm>
+            <a:off x="4338218" y="1691640"/>
+            <a:ext cx="3515258" cy="2103120"/>
+          </a:xfrm>
+          <a:prstGeom prst="roundRect">
+            <a:avLst>
+              <a:gd name="adj" fmla="val 3478"/>
+            </a:avLst>
+          </a:prstGeom>
+          <a:solidFill>
+            <a:schemeClr val="bg2"/>
+          </a:solidFill>
+          <a:ln w="9525">
+            <a:solidFill>
+              <a:srgbClr val="C4CBD8"/>
+            </a:solidFill>
+            <a:prstDash val="solid"/>
+          </a:ln>
+        </p:spPr>
+      </p:sp>
+      <p:sp>
+        <p:nvSpPr>
+          <p:cNvPr id="10" name="Card label"/>
+          <p:cNvSpPr txBox="1"/>
+          <p:nvPr/>
+        </p:nvSpPr>
+        <p:spPr>
+          <a:xfrm>
+            <a:off x="4521098" y="1819656"/>
+            <a:ext cx="3149498" cy="310896"/>
+          </a:xfrm>
+          <a:prstGeom prst="rect">
+            <a:avLst/>
+          </a:prstGeom>
+          <a:noFill/>
+          <a:ln/>
+        </p:spPr>
+        <p:txBody>
+          <a:bodyPr wrap="square" lIns="0" tIns="0" rIns="0" bIns="0" rtlCol="0" anchor="ctr"/>
+          <a:lstStyle/>
+          <a:p>
+            <a:pPr indent="0" marL="0">
+              <a:buNone/>
+            </a:pPr>
+            <a:r>
+              <a:rPr lang="en-US" sz="1300" b="1" dirty="0">
+                <a:solidFill>
+                  <a:schemeClr val="accent1"/>
+                </a:solidFill>
+              </a:rPr>
+              <a:t>The method</a:t>
+            </a:r>
+            <a:endParaRPr lang="en-US" sz="1300" dirty="0"/>
+          </a:p>
+        </p:txBody>
+      </p:sp>
+      <p:sp>
+        <p:nvSpPr>
+          <p:cNvPr id="11" name="Card head"/>
+          <p:cNvSpPr txBox="1"/>
+          <p:nvPr/>
+        </p:nvSpPr>
+        <p:spPr>
+          <a:xfrm>
+            <a:off x="4521098" y="2148840"/>
+            <a:ext cx="3149498" cy="576072"/>
+          </a:xfrm>
+          <a:prstGeom prst="rect">
+            <a:avLst/>
+          </a:prstGeom>
+          <a:noFill/>
+          <a:ln/>
+        </p:spPr>
+        <p:txBody>
+          <a:bodyPr wrap="square" lIns="0" tIns="0" rIns="0" bIns="0" rtlCol="0" anchor="t"/>
+          <a:lstStyle/>
+          <a:p>
+            <a:pPr indent="0" marL="0">
+              <a:buNone/>
+            </a:pPr>
+            <a:r>
+              <a:rPr lang="en-US" sz="1600" b="1" dirty="0">
                 <a:solidFill>
                   <a:schemeClr val="tx1"/>
                 </a:solidFill>
-              </a:rPr>
-              <a:t> a one-page note to the board: the package or rule, its cost and its chance of a breach on fresh paths with their errors, the value of information, and the declarations the answer rests on. About 75 minutes.</a:t>
-            </a:r>
-            <a:endParaRPr lang="en-US" sz="1400" dirty="0"/>
+                <a:latin typeface="Cambria" pitchFamily="34" charset="0"/>
+                <a:ea typeface="Cambria" pitchFamily="34" charset="-122"/>
+                <a:cs typeface="Cambria" pitchFamily="34" charset="-120"/>
+              </a:rPr>
+              <a:t>SDDP and the water value</a:t>
+            </a:r>
+            <a:endParaRPr lang="en-US" sz="1600" dirty="0"/>
+          </a:p>
+        </p:txBody>
+      </p:sp>
+      <p:sp>
+        <p:nvSpPr>
+          <p:cNvPr id="12" name="Card text"/>
+          <p:cNvSpPr txBox="1"/>
+          <p:nvPr/>
+        </p:nvSpPr>
+        <p:spPr>
+          <a:xfrm>
+            <a:off x="4521098" y="2798064"/>
+            <a:ext cx="3149498" cy="868680"/>
+          </a:xfrm>
+          <a:prstGeom prst="rect">
+            <a:avLst/>
+          </a:prstGeom>
+          <a:noFill/>
+          <a:ln/>
+        </p:spPr>
+        <p:txBody>
+          <a:bodyPr wrap="square" lIns="0" tIns="0" rIns="0" bIns="0" rtlCol="0" anchor="t"/>
+          <a:lstStyle/>
+          <a:p>
+            <a:pPr indent="0" marL="0">
+              <a:buNone/>
+            </a:pPr>
+            <a:r>
+              <a:rPr lang="en-US" sz="1300" dirty="0">
+                <a:solidFill>
+                  <a:schemeClr val="tx2"/>
+                </a:solidFill>
+              </a:rPr>
+              <a:t>Expected future cost from cuts built on dual solutions; its slope in stored water is the water value.</a:t>
+            </a:r>
+            <a:endParaRPr lang="en-US" sz="1300" dirty="0"/>
+          </a:p>
+        </p:txBody>
+      </p:sp>
+      <p:sp>
+        <p:nvSpPr>
+          <p:cNvPr id="13" name="Card"/>
+          <p:cNvSpPr/>
+          <p:nvPr/>
+        </p:nvSpPr>
+        <p:spPr>
+          <a:xfrm>
+            <a:off x="8127797" y="1691640"/>
+            <a:ext cx="3515258" cy="2103120"/>
+          </a:xfrm>
+          <a:prstGeom prst="roundRect">
+            <a:avLst>
+              <a:gd name="adj" fmla="val 3478"/>
+            </a:avLst>
+          </a:prstGeom>
+          <a:solidFill>
+            <a:schemeClr val="tx1"/>
+          </a:solidFill>
+          <a:ln w="9525">
+            <a:solidFill>
+              <a:srgbClr val="0F1E3D"/>
+            </a:solidFill>
+            <a:prstDash val="solid"/>
+          </a:ln>
+        </p:spPr>
+      </p:sp>
+      <p:sp>
+        <p:nvSpPr>
+          <p:cNvPr id="14" name="Card label"/>
+          <p:cNvSpPr txBox="1"/>
+          <p:nvPr/>
+        </p:nvSpPr>
+        <p:spPr>
+          <a:xfrm>
+            <a:off x="8310677" y="1819656"/>
+            <a:ext cx="3149498" cy="310896"/>
+          </a:xfrm>
+          <a:prstGeom prst="rect">
+            <a:avLst/>
+          </a:prstGeom>
+          <a:noFill/>
+          <a:ln/>
+        </p:spPr>
+        <p:txBody>
+          <a:bodyPr wrap="square" lIns="0" tIns="0" rIns="0" bIns="0" rtlCol="0" anchor="ctr"/>
+          <a:lstStyle/>
+          <a:p>
+            <a:pPr indent="0" marL="0">
+              <a:buNone/>
+            </a:pPr>
+            <a:r>
+              <a:rPr lang="en-US" sz="1300" b="1" dirty="0">
+                <a:solidFill>
+                  <a:schemeClr val="accent1"/>
+                </a:solidFill>
+              </a:rPr>
+              <a:t>The result</a:t>
+            </a:r>
+            <a:endParaRPr lang="en-US" sz="1300" dirty="0"/>
+          </a:p>
+        </p:txBody>
+      </p:sp>
+      <p:sp>
+        <p:nvSpPr>
+          <p:cNvPr id="15" name="Card head"/>
+          <p:cNvSpPr txBox="1"/>
+          <p:nvPr/>
+        </p:nvSpPr>
+        <p:spPr>
+          <a:xfrm>
+            <a:off x="8310677" y="2148840"/>
+            <a:ext cx="3149498" cy="576072"/>
+          </a:xfrm>
+          <a:prstGeom prst="rect">
+            <a:avLst/>
+          </a:prstGeom>
+          <a:noFill/>
+          <a:ln/>
+        </p:spPr>
+        <p:txBody>
+          <a:bodyPr wrap="square" lIns="0" tIns="0" rIns="0" bIns="0" rtlCol="0" anchor="t"/>
+          <a:lstStyle/>
+          <a:p>
+            <a:pPr indent="0" marL="0">
+              <a:buNone/>
+            </a:pPr>
+            <a:r>
+              <a:rPr lang="en-US" sz="1600" b="1" dirty="0">
+                <a:solidFill>
+                  <a:schemeClr val="bg1"/>
+                </a:solidFill>
+                <a:latin typeface="Cambria" pitchFamily="34" charset="0"/>
+                <a:ea typeface="Cambria" pitchFamily="34" charset="-122"/>
+                <a:cs typeface="Cambria" pitchFamily="34" charset="-120"/>
+              </a:rPr>
+              <a:t>It runs dispatch and the spot price</a:t>
+            </a:r>
+            <a:endParaRPr lang="en-US" sz="1600" dirty="0"/>
+          </a:p>
+        </p:txBody>
+      </p:sp>
+      <p:sp>
+        <p:nvSpPr>
+          <p:cNvPr id="16" name="Card text"/>
+          <p:cNvSpPr txBox="1"/>
+          <p:nvPr/>
+        </p:nvSpPr>
+        <p:spPr>
+          <a:xfrm>
+            <a:off x="8310677" y="2798064"/>
+            <a:ext cx="3149498" cy="868680"/>
+          </a:xfrm>
+          <a:prstGeom prst="rect">
+            <a:avLst/>
+          </a:prstGeom>
+          <a:noFill/>
+          <a:ln/>
+        </p:spPr>
+        <p:txBody>
+          <a:bodyPr wrap="square" lIns="0" tIns="0" rIns="0" bIns="0" rtlCol="0" anchor="t"/>
+          <a:lstStyle/>
+          <a:p>
+            <a:pPr indent="0" marL="0">
+              <a:buNone/>
+            </a:pPr>
+            <a:r>
+              <a:rPr lang="en-US" sz="1300" dirty="0">
+                <a:solidFill>
+                  <a:schemeClr val="bg2"/>
+                </a:solidFill>
+              </a:rPr>
+              <a:t>Risk aversion, now the conditional value at risk, was added after the 2001 rationing.</a:t>
+            </a:r>
+            <a:endParaRPr lang="en-US" sz="1300" dirty="0"/>
+          </a:p>
+        </p:txBody>
+      </p:sp>
+      <p:sp>
+        <p:nvSpPr>
+          <p:cNvPr id="17" name="Card"/>
+          <p:cNvSpPr/>
+          <p:nvPr/>
+        </p:nvSpPr>
+        <p:spPr>
+          <a:xfrm>
+            <a:off x="548640" y="4069080"/>
+            <a:ext cx="3515258" cy="2103120"/>
+          </a:xfrm>
+          <a:prstGeom prst="roundRect">
+            <a:avLst>
+              <a:gd name="adj" fmla="val 3478"/>
+            </a:avLst>
+          </a:prstGeom>
+          <a:solidFill>
+            <a:schemeClr val="bg2"/>
+          </a:solidFill>
+          <a:ln w="9525">
+            <a:solidFill>
+              <a:srgbClr val="C4CBD8"/>
+            </a:solidFill>
+            <a:prstDash val="solid"/>
+          </a:ln>
+        </p:spPr>
+      </p:sp>
+      <p:sp>
+        <p:nvSpPr>
+          <p:cNvPr id="18" name="Card label"/>
+          <p:cNvSpPr txBox="1"/>
+          <p:nvPr/>
+        </p:nvSpPr>
+        <p:spPr>
+          <a:xfrm>
+            <a:off x="731520" y="4197096"/>
+            <a:ext cx="3149498" cy="310896"/>
+          </a:xfrm>
+          <a:prstGeom prst="rect">
+            <a:avLst/>
+          </a:prstGeom>
+          <a:noFill/>
+          <a:ln/>
+        </p:spPr>
+        <p:txBody>
+          <a:bodyPr wrap="square" lIns="0" tIns="0" rIns="0" bIns="0" rtlCol="0" anchor="ctr"/>
+          <a:lstStyle/>
+          <a:p>
+            <a:pPr indent="0" marL="0">
+              <a:buNone/>
+            </a:pPr>
+            <a:r>
+              <a:rPr lang="en-US" sz="1300" b="1" dirty="0">
+                <a:solidFill>
+                  <a:schemeClr val="accent1"/>
+                </a:solidFill>
+              </a:rPr>
+              <a:t>Making it work</a:t>
+            </a:r>
+            <a:endParaRPr lang="en-US" sz="1300" dirty="0"/>
+          </a:p>
+        </p:txBody>
+      </p:sp>
+      <p:sp>
+        <p:nvSpPr>
+          <p:cNvPr id="19" name="Card head"/>
+          <p:cNvSpPr txBox="1"/>
+          <p:nvPr/>
+        </p:nvSpPr>
+        <p:spPr>
+          <a:xfrm>
+            <a:off x="731520" y="4526280"/>
+            <a:ext cx="3149498" cy="576072"/>
+          </a:xfrm>
+          <a:prstGeom prst="rect">
+            <a:avLst/>
+          </a:prstGeom>
+          <a:noFill/>
+          <a:ln/>
+        </p:spPr>
+        <p:txBody>
+          <a:bodyPr wrap="square" lIns="0" tIns="0" rIns="0" bIns="0" rtlCol="0" anchor="t"/>
+          <a:lstStyle/>
+          <a:p>
+            <a:pPr indent="0" marL="0">
+              <a:buNone/>
+            </a:pPr>
+            <a:r>
+              <a:rPr lang="en-US" sz="1600" b="1" dirty="0">
+                <a:solidFill>
+                  <a:schemeClr val="tx1"/>
+                </a:solidFill>
+                <a:latin typeface="Cambria" pitchFamily="34" charset="0"/>
+                <a:ea typeface="Cambria" pitchFamily="34" charset="-122"/>
+                <a:cs typeface="Cambria" pitchFamily="34" charset="-120"/>
+              </a:rPr>
+              <a:t>The 2001 rationing</a:t>
+            </a:r>
+            <a:endParaRPr lang="en-US" sz="1600" dirty="0"/>
+          </a:p>
+        </p:txBody>
+      </p:sp>
+      <p:sp>
+        <p:nvSpPr>
+          <p:cNvPr id="20" name="Card text"/>
+          <p:cNvSpPr txBox="1"/>
+          <p:nvPr/>
+        </p:nvSpPr>
+        <p:spPr>
+          <a:xfrm>
+            <a:off x="731520" y="5175504"/>
+            <a:ext cx="3149498" cy="868680"/>
+          </a:xfrm>
+          <a:prstGeom prst="rect">
+            <a:avLst/>
+          </a:prstGeom>
+          <a:noFill/>
+          <a:ln/>
+        </p:spPr>
+        <p:txBody>
+          <a:bodyPr wrap="square" lIns="0" tIns="0" rIns="0" bIns="0" rtlCol="0" anchor="t"/>
+          <a:lstStyle/>
+          <a:p>
+            <a:pPr indent="0" marL="0">
+              <a:buNone/>
+            </a:pPr>
+            <a:r>
+              <a:rPr lang="en-US" sz="1300" dirty="0">
+                <a:solidFill>
+                  <a:schemeClr val="tx2"/>
+                </a:solidFill>
+              </a:rPr>
+              <a:t>Delayed and unbuilt plants, not only a dry year, made the crisis; risk aversion was built into the models afterward.</a:t>
+            </a:r>
+            <a:endParaRPr lang="en-US" sz="1300" dirty="0"/>
+          </a:p>
+        </p:txBody>
+      </p:sp>
+      <p:sp>
+        <p:nvSpPr>
+          <p:cNvPr id="21" name="Card"/>
+          <p:cNvSpPr/>
+          <p:nvPr/>
+        </p:nvSpPr>
+        <p:spPr>
+          <a:xfrm>
+            <a:off x="4338218" y="4069080"/>
+            <a:ext cx="3515258" cy="2103120"/>
+          </a:xfrm>
+          <a:prstGeom prst="roundRect">
+            <a:avLst>
+              <a:gd name="adj" fmla="val 3478"/>
+            </a:avLst>
+          </a:prstGeom>
+          <a:solidFill>
+            <a:schemeClr val="bg2"/>
+          </a:solidFill>
+          <a:ln w="9525">
+            <a:solidFill>
+              <a:srgbClr val="C4CBD8"/>
+            </a:solidFill>
+            <a:prstDash val="solid"/>
+          </a:ln>
+        </p:spPr>
+      </p:sp>
+      <p:sp>
+        <p:nvSpPr>
+          <p:cNvPr id="22" name="Card label"/>
+          <p:cNvSpPr txBox="1"/>
+          <p:nvPr/>
+        </p:nvSpPr>
+        <p:spPr>
+          <a:xfrm>
+            <a:off x="4521098" y="4197096"/>
+            <a:ext cx="3149498" cy="310896"/>
+          </a:xfrm>
+          <a:prstGeom prst="rect">
+            <a:avLst/>
+          </a:prstGeom>
+          <a:noFill/>
+          <a:ln/>
+        </p:spPr>
+        <p:txBody>
+          <a:bodyPr wrap="square" lIns="0" tIns="0" rIns="0" bIns="0" rtlCol="0" anchor="ctr"/>
+          <a:lstStyle/>
+          <a:p>
+            <a:pPr indent="0" marL="0">
+              <a:buNone/>
+            </a:pPr>
+            <a:r>
+              <a:rPr lang="en-US" sz="1300" b="1" dirty="0">
+                <a:solidFill>
+                  <a:schemeClr val="accent1"/>
+                </a:solidFill>
+              </a:rPr>
+              <a:t>What Meridian takes</a:t>
+            </a:r>
+            <a:endParaRPr lang="en-US" sz="1300" dirty="0"/>
+          </a:p>
+        </p:txBody>
+      </p:sp>
+      <p:sp>
+        <p:nvSpPr>
+          <p:cNvPr id="23" name="Card head"/>
+          <p:cNvSpPr txBox="1"/>
+          <p:nvPr/>
+        </p:nvSpPr>
+        <p:spPr>
+          <a:xfrm>
+            <a:off x="4521098" y="4526280"/>
+            <a:ext cx="3149498" cy="576072"/>
+          </a:xfrm>
+          <a:prstGeom prst="rect">
+            <a:avLst/>
+          </a:prstGeom>
+          <a:noFill/>
+          <a:ln/>
+        </p:spPr>
+        <p:txBody>
+          <a:bodyPr wrap="square" lIns="0" tIns="0" rIns="0" bIns="0" rtlCol="0" anchor="t"/>
+          <a:lstStyle/>
+          <a:p>
+            <a:pPr indent="0" marL="0">
+              <a:buNone/>
+            </a:pPr>
+            <a:r>
+              <a:rPr lang="en-US" sz="1600" b="1" dirty="0">
+                <a:solidFill>
+                  <a:schemeClr val="tx1"/>
+                </a:solidFill>
+                <a:latin typeface="Cambria" pitchFamily="34" charset="0"/>
+                <a:ea typeface="Cambria" pitchFamily="34" charset="-122"/>
+                <a:cs typeface="Cambria" pitchFamily="34" charset="-120"/>
+              </a:rPr>
+              <a:t>The same 5 percent appetite</a:t>
+            </a:r>
+            <a:endParaRPr lang="en-US" sz="1600" dirty="0"/>
+          </a:p>
+        </p:txBody>
+      </p:sp>
+      <p:sp>
+        <p:nvSpPr>
+          <p:cNvPr id="24" name="Card text"/>
+          <p:cNvSpPr txBox="1"/>
+          <p:nvPr/>
+        </p:nvSpPr>
+        <p:spPr>
+          <a:xfrm>
+            <a:off x="4521098" y="5175504"/>
+            <a:ext cx="3149498" cy="868680"/>
+          </a:xfrm>
+          <a:prstGeom prst="rect">
+            <a:avLst/>
+          </a:prstGeom>
+          <a:noFill/>
+          <a:ln/>
+        </p:spPr>
+        <p:txBody>
+          <a:bodyPr wrap="square" lIns="0" tIns="0" rIns="0" bIns="0" rtlCol="0" anchor="t"/>
+          <a:lstStyle/>
+          <a:p>
+            <a:pPr indent="0" marL="0">
+              <a:buNone/>
+            </a:pPr>
+            <a:r>
+              <a:rPr lang="en-US" sz="1300" dirty="0">
+                <a:solidFill>
+                  <a:schemeClr val="tx2"/>
+                </a:solidFill>
+              </a:rPr>
+              <a:t>A chance commitment counts how often a breach occurs, not how deep it goes: Worked Example 9.1.</a:t>
+            </a:r>
+            <a:endParaRPr lang="en-US" sz="1300" dirty="0"/>
+          </a:p>
+        </p:txBody>
+      </p:sp>
+      <p:sp>
+        <p:nvSpPr>
+          <p:cNvPr id="25" name="Card"/>
+          <p:cNvSpPr/>
+          <p:nvPr/>
+        </p:nvSpPr>
+        <p:spPr>
+          <a:xfrm>
+            <a:off x="8127797" y="4069080"/>
+            <a:ext cx="3515258" cy="2103120"/>
+          </a:xfrm>
+          <a:prstGeom prst="roundRect">
+            <a:avLst>
+              <a:gd name="adj" fmla="val 3478"/>
+            </a:avLst>
+          </a:prstGeom>
+          <a:solidFill>
+            <a:schemeClr val="bg2"/>
+          </a:solidFill>
+          <a:ln w="9525">
+            <a:solidFill>
+              <a:srgbClr val="C4CBD8"/>
+            </a:solidFill>
+            <a:prstDash val="solid"/>
+          </a:ln>
+        </p:spPr>
+      </p:sp>
+      <p:sp>
+        <p:nvSpPr>
+          <p:cNvPr id="26" name="Card label"/>
+          <p:cNvSpPr txBox="1"/>
+          <p:nvPr/>
+        </p:nvSpPr>
+        <p:spPr>
+          <a:xfrm>
+            <a:off x="8310677" y="4197096"/>
+            <a:ext cx="3149498" cy="310896"/>
+          </a:xfrm>
+          <a:prstGeom prst="rect">
+            <a:avLst/>
+          </a:prstGeom>
+          <a:noFill/>
+          <a:ln/>
+        </p:spPr>
+        <p:txBody>
+          <a:bodyPr wrap="square" lIns="0" tIns="0" rIns="0" bIns="0" rtlCol="0" anchor="ctr"/>
+          <a:lstStyle/>
+          <a:p>
+            <a:pPr indent="0" marL="0">
+              <a:buNone/>
+            </a:pPr>
+            <a:r>
+              <a:rPr lang="en-US" sz="1300" b="1" dirty="0">
+                <a:solidFill>
+                  <a:schemeClr val="accent1"/>
+                </a:solidFill>
+              </a:rPr>
+              <a:t>For the board</a:t>
+            </a:r>
+            <a:endParaRPr lang="en-US" sz="1300" dirty="0"/>
+          </a:p>
+        </p:txBody>
+      </p:sp>
+      <p:sp>
+        <p:nvSpPr>
+          <p:cNvPr id="27" name="Card head"/>
+          <p:cNvSpPr txBox="1"/>
+          <p:nvPr/>
+        </p:nvSpPr>
+        <p:spPr>
+          <a:xfrm>
+            <a:off x="8310677" y="4526280"/>
+            <a:ext cx="3149498" cy="576072"/>
+          </a:xfrm>
+          <a:prstGeom prst="rect">
+            <a:avLst/>
+          </a:prstGeom>
+          <a:noFill/>
+          <a:ln/>
+        </p:spPr>
+        <p:txBody>
+          <a:bodyPr wrap="square" lIns="0" tIns="0" rIns="0" bIns="0" rtlCol="0" anchor="t"/>
+          <a:lstStyle/>
+          <a:p>
+            <a:pPr indent="0" marL="0">
+              <a:buNone/>
+            </a:pPr>
+            <a:r>
+              <a:rPr lang="en-US" sz="1600" b="1" dirty="0">
+                <a:solidFill>
+                  <a:schemeClr val="tx1"/>
+                </a:solidFill>
+                <a:latin typeface="Cambria" pitchFamily="34" charset="0"/>
+                <a:ea typeface="Cambria" pitchFamily="34" charset="-122"/>
+                <a:cs typeface="Cambria" pitchFamily="34" charset="-120"/>
+              </a:rPr>
+              <a:t>How deep, not only how often?</a:t>
+            </a:r>
+            <a:endParaRPr lang="en-US" sz="1600" dirty="0"/>
+          </a:p>
+        </p:txBody>
+      </p:sp>
+      <p:sp>
+        <p:nvSpPr>
+          <p:cNvPr id="28" name="Card text"/>
+          <p:cNvSpPr txBox="1"/>
+          <p:nvPr/>
+        </p:nvSpPr>
+        <p:spPr>
+          <a:xfrm>
+            <a:off x="8310677" y="5175504"/>
+            <a:ext cx="3149498" cy="868680"/>
+          </a:xfrm>
+          <a:prstGeom prst="rect">
+            <a:avLst/>
+          </a:prstGeom>
+          <a:noFill/>
+          <a:ln/>
+        </p:spPr>
+        <p:txBody>
+          <a:bodyPr wrap="square" lIns="0" tIns="0" rIns="0" bIns="0" rtlCol="0" anchor="t"/>
+          <a:lstStyle/>
+          <a:p>
+            <a:pPr indent="0" marL="0">
+              <a:buNone/>
+            </a:pPr>
+            <a:r>
+              <a:rPr lang="en-US" sz="1300" dirty="0">
+                <a:solidFill>
+                  <a:schemeClr val="tx2"/>
+                </a:solidFill>
+              </a:rPr>
+              <a:t>Who chooses the weight on the worst scenarios, and who pays for that choice?</a:t>
+            </a:r>
+            <a:endParaRPr lang="en-US" sz="1300" dirty="0"/>
           </a:p>
         </p:txBody>
       </p:sp>
@@ -15758,7 +15831,7 @@
                   <a:schemeClr val="accent1"/>
                 </a:solidFill>
               </a:rPr>
-              <a:t>KEY TAKEAWAYS</a:t>
+              <a:t>AXIOM LAB 2.9 · MODULE AXIOM-09</a:t>
             </a:r>
             <a:endParaRPr lang="en-US" sz="1200" dirty="0"/>
           </a:p>
@@ -15799,22 +15872,105 @@
                 <a:ea typeface="Cambria" pitchFamily="34" charset="-122"/>
                 <a:cs typeface="Cambria" pitchFamily="34" charset="-120"/>
               </a:rPr>
-              <a:t>What to carry forward</a:t>
+              <a:t>Keeping Meridian's appetite, in AXIOM</a:t>
             </a:r>
             <a:endParaRPr lang="en-US" sz="3200" dirty="0"/>
           </a:p>
         </p:txBody>
       </p:sp>
-      <p:sp>
-        <p:nvSpPr>
-          <p:cNvPr id="5" name="Number"/>
+      <p:pic>
+        <p:nvPicPr>
+          <p:cNvPr id="5" name="AXIOM logo" descr="AXIOM">    </p:cNvPr>
+          <p:cNvPicPr>
+            <a:picLocks noChangeAspect="1"/>
+          </p:cNvPicPr>
+          <p:nvPr/>
+        </p:nvPicPr>
+        <p:blipFill>
+          <a:blip r:embed="rId1"/>
+          <a:stretch>
+            <a:fillRect/>
+          </a:stretch>
+        </p:blipFill>
+        <p:spPr>
+          <a:xfrm>
+            <a:off x="9539935" y="310896"/>
+            <a:ext cx="2103120" cy="420624"/>
+          </a:xfrm>
+          <a:prstGeom prst="rect">
+            <a:avLst/>
+          </a:prstGeom>
+        </p:spPr>
+      </p:pic>
+      <p:sp>
+        <p:nvSpPr>
+          <p:cNvPr id="6" name="Situation"/>
+          <p:cNvSpPr txBox="1"/>
+          <p:nvPr/>
+        </p:nvSpPr>
+        <p:spPr>
+          <a:xfrm>
+            <a:off x="548640" y="1645920"/>
+            <a:ext cx="11094415" cy="777240"/>
+          </a:xfrm>
+          <a:prstGeom prst="rect">
+            <a:avLst/>
+          </a:prstGeom>
+          <a:noFill/>
+          <a:ln/>
+        </p:spPr>
+        <p:txBody>
+          <a:bodyPr wrap="square" lIns="0" tIns="0" rIns="0" bIns="0" rtlCol="0" anchor="t"/>
+          <a:lstStyle/>
+          <a:p>
+            <a:pPr indent="0" marL="0">
+              <a:buNone/>
+            </a:pPr>
+            <a:r>
+              <a:rPr lang="en-US" sz="1500" dirty="0">
+                <a:solidFill>
+                  <a:schemeClr val="tx1"/>
+                </a:solidFill>
+              </a:rPr>
+              <a:t>The board wants the cheapest way to keep its appetite, checked on paths the design has not seen. Open AXIOM, choose Lab 2.9 and load the Meridian liquidity instance (Volume I, Chapter 8's law) and the hiring instance with HR's record.</a:t>
+            </a:r>
+            <a:endParaRPr lang="en-US" sz="1500" dirty="0"/>
+          </a:p>
+        </p:txBody>
+      </p:sp>
+      <p:sp>
+        <p:nvSpPr>
+          <p:cNvPr id="7" name="Flow line"/>
           <p:cNvSpPr/>
           <p:nvPr/>
         </p:nvSpPr>
         <p:spPr>
           <a:xfrm>
-            <a:off x="548640" y="1737360"/>
-            <a:ext cx="566928" cy="566928"/>
+            <a:off x="1658082" y="2880360"/>
+            <a:ext cx="8875532" cy="0"/>
+          </a:xfrm>
+          <a:prstGeom prst="line">
+            <a:avLst/>
+          </a:prstGeom>
+          <a:noFill/>
+          <a:ln w="25400">
+            <a:solidFill>
+              <a:srgbClr val="C4CBD8"/>
+            </a:solidFill>
+            <a:prstDash val="solid"/>
+          </a:ln>
+        </p:spPr>
+      </p:sp>
+      <p:sp>
+        <p:nvSpPr>
+          <p:cNvPr id="8" name="Number"/>
+          <p:cNvSpPr/>
+          <p:nvPr/>
+        </p:nvSpPr>
+        <p:spPr>
+          <a:xfrm>
+            <a:off x="1383762" y="2606040"/>
+            <a:ext cx="548640" cy="548640"/>
           </a:xfrm>
           <a:prstGeom prst="ellipse">
             <a:avLst/>
@@ -15832,14 +15988,14 @@
       </p:sp>
       <p:sp>
         <p:nvSpPr>
-          <p:cNvPr id="6" name="Text 3"/>
+          <p:cNvPr id="9" name="Text 5"/>
           <p:cNvSpPr txBox="1"/>
           <p:nvPr/>
         </p:nvSpPr>
         <p:spPr>
           <a:xfrm>
-            <a:off x="548640" y="1737360"/>
-            <a:ext cx="566928" cy="566928"/>
+            <a:off x="1383762" y="2606040"/>
+            <a:ext cx="548640" cy="548640"/>
           </a:xfrm>
           <a:prstGeom prst="rect">
             <a:avLst/>
@@ -15855,7 +16011,7 @@
               <a:buNone/>
             </a:pPr>
             <a:r>
-              <a:rPr lang="en-US" sz="1500" b="1" dirty="0">
+              <a:rPr lang="en-US" sz="1600" b="1" dirty="0">
                 <a:solidFill>
                   <a:schemeClr val="bg1"/>
                 </a:solidFill>
@@ -15865,20 +16021,20 @@
               </a:rPr>
               <a:t>1</a:t>
             </a:r>
-            <a:endParaRPr lang="en-US" sz="1500" dirty="0"/>
-          </a:p>
-        </p:txBody>
-      </p:sp>
-      <p:sp>
-        <p:nvSpPr>
-          <p:cNvPr id="7" name="Row text"/>
+            <a:endParaRPr lang="en-US" sz="1600" dirty="0"/>
+          </a:p>
+        </p:txBody>
+      </p:sp>
+      <p:sp>
+        <p:nvSpPr>
+          <p:cNvPr id="10" name="Flow head"/>
           <p:cNvSpPr txBox="1"/>
           <p:nvPr/>
         </p:nvSpPr>
         <p:spPr>
           <a:xfrm>
-            <a:off x="1325880" y="1691640"/>
-            <a:ext cx="10317175" cy="841248"/>
+            <a:off x="621792" y="3291840"/>
+            <a:ext cx="2072579" cy="548640"/>
           </a:xfrm>
           <a:prstGeom prst="rect">
             <a:avLst/>
@@ -15887,34 +16043,73 @@
           <a:ln/>
         </p:spPr>
         <p:txBody>
-          <a:bodyPr wrap="square" lIns="0" tIns="0" rIns="0" bIns="0" rtlCol="0" anchor="ctr"/>
-          <a:lstStyle/>
-          <a:p>
-            <a:pPr indent="0" marL="0">
+          <a:bodyPr wrap="square" lIns="0" tIns="0" rIns="0" bIns="0" rtlCol="0" anchor="t"/>
+          <a:lstStyle/>
+          <a:p>
+            <a:pPr algn="ctr" indent="0" marL="0">
               <a:buNone/>
             </a:pPr>
             <a:r>
-              <a:rPr lang="en-US" sz="1500" dirty="0">
+              <a:rPr lang="en-US" sz="1600" b="1" dirty="0">
                 <a:solidFill>
                   <a:schemeClr val="tx1"/>
                 </a:solidFill>
-              </a:rPr>
-              <a:t>Declaring a probability law turns the objective into an expected value, a commitment into one kept on every path, on average, or with a stated probability, and a decision into a rule that reads only what has been revealed. The average path is not a plan.</a:t>
-            </a:r>
-            <a:endParaRPr lang="en-US" sz="1500" dirty="0"/>
-          </a:p>
-        </p:txBody>
-      </p:sp>
-      <p:sp>
-        <p:nvSpPr>
-          <p:cNvPr id="8" name="Number"/>
+                <a:latin typeface="Cambria" pitchFamily="34" charset="0"/>
+                <a:ea typeface="Cambria" pitchFamily="34" charset="-122"/>
+                <a:cs typeface="Cambria" pitchFamily="34" charset="-120"/>
+              </a:rPr>
+              <a:t>Estimate and check</a:t>
+            </a:r>
+            <a:endParaRPr lang="en-US" sz="1600" dirty="0"/>
+          </a:p>
+        </p:txBody>
+      </p:sp>
+      <p:sp>
+        <p:nvSpPr>
+          <p:cNvPr id="11" name="Flow text"/>
+          <p:cNvSpPr txBox="1"/>
+          <p:nvPr/>
+        </p:nvSpPr>
+        <p:spPr>
+          <a:xfrm>
+            <a:off x="640080" y="3867912"/>
+            <a:ext cx="2036003" cy="1554480"/>
+          </a:xfrm>
+          <a:prstGeom prst="rect">
+            <a:avLst/>
+          </a:prstGeom>
+          <a:noFill/>
+          <a:ln/>
+        </p:spPr>
+        <p:txBody>
+          <a:bodyPr wrap="square" lIns="0" tIns="0" rIns="0" bIns="0" rtlCol="0" anchor="t"/>
+          <a:lstStyle/>
+          <a:p>
+            <a:pPr algn="ctr" indent="0" marL="0">
+              <a:buNone/>
+            </a:pPr>
+            <a:r>
+              <a:rPr lang="en-US" sz="1400" dirty="0">
+                <a:solidFill>
+                  <a:schemeClr val="tx2"/>
+                </a:solidFill>
+              </a:rPr>
+              <a:t>Chances by quarter and over the program, with standard errors.</a:t>
+            </a:r>
+            <a:endParaRPr lang="en-US" sz="1400" dirty="0"/>
+          </a:p>
+        </p:txBody>
+      </p:sp>
+      <p:sp>
+        <p:nvSpPr>
+          <p:cNvPr id="12" name="Number"/>
           <p:cNvSpPr/>
           <p:nvPr/>
         </p:nvSpPr>
         <p:spPr>
           <a:xfrm>
-            <a:off x="548640" y="2633472"/>
-            <a:ext cx="566928" cy="566928"/>
+            <a:off x="3602645" y="2606040"/>
+            <a:ext cx="548640" cy="548640"/>
           </a:xfrm>
           <a:prstGeom prst="ellipse">
             <a:avLst/>
@@ -15932,14 +16127,14 @@
       </p:sp>
       <p:sp>
         <p:nvSpPr>
-          <p:cNvPr id="9" name="Text 6"/>
+          <p:cNvPr id="13" name="Text 9"/>
           <p:cNvSpPr txBox="1"/>
           <p:nvPr/>
         </p:nvSpPr>
         <p:spPr>
           <a:xfrm>
-            <a:off x="548640" y="2633472"/>
-            <a:ext cx="566928" cy="566928"/>
+            <a:off x="3602645" y="2606040"/>
+            <a:ext cx="548640" cy="548640"/>
           </a:xfrm>
           <a:prstGeom prst="rect">
             <a:avLst/>
@@ -15955,7 +16150,7 @@
               <a:buNone/>
             </a:pPr>
             <a:r>
-              <a:rPr lang="en-US" sz="1500" b="1" dirty="0">
+              <a:rPr lang="en-US" sz="1600" b="1" dirty="0">
                 <a:solidFill>
                   <a:schemeClr val="bg1"/>
                 </a:solidFill>
@@ -15965,20 +16160,20 @@
               </a:rPr>
               <a:t>2</a:t>
             </a:r>
-            <a:endParaRPr lang="en-US" sz="1500" dirty="0"/>
-          </a:p>
-        </p:txBody>
-      </p:sp>
-      <p:sp>
-        <p:nvSpPr>
-          <p:cNvPr id="10" name="Row text"/>
+            <a:endParaRPr lang="en-US" sz="1600" dirty="0"/>
+          </a:p>
+        </p:txBody>
+      </p:sp>
+      <p:sp>
+        <p:nvSpPr>
+          <p:cNvPr id="14" name="Flow head"/>
           <p:cNvSpPr txBox="1"/>
           <p:nvPr/>
         </p:nvSpPr>
         <p:spPr>
           <a:xfrm>
-            <a:off x="1325880" y="2587752"/>
-            <a:ext cx="10317175" cy="841248"/>
+            <a:off x="2840675" y="3291840"/>
+            <a:ext cx="2072579" cy="548640"/>
           </a:xfrm>
           <a:prstGeom prst="rect">
             <a:avLst/>
@@ -15987,34 +16182,73 @@
           <a:ln/>
         </p:spPr>
         <p:txBody>
-          <a:bodyPr wrap="square" lIns="0" tIns="0" rIns="0" bIns="0" rtlCol="0" anchor="ctr"/>
-          <a:lstStyle/>
-          <a:p>
-            <a:pPr indent="0" marL="0">
+          <a:bodyPr wrap="square" lIns="0" tIns="0" rIns="0" bIns="0" rtlCol="0" anchor="t"/>
+          <a:lstStyle/>
+          <a:p>
+            <a:pPr algn="ctr" indent="0" marL="0">
               <a:buNone/>
             </a:pPr>
             <a:r>
-              <a:rPr lang="en-US" sz="1500" dirty="0">
+              <a:rPr lang="en-US" sz="1600" b="1" dirty="0">
                 <a:solidFill>
                   <a:schemeClr val="tx1"/>
                 </a:solidFill>
-              </a:rPr>
-              <a:t>With outside events, the HJB equation gains half their spread priced at the value's curvature. Verification carries over in expectation, and along the best rule the value ledger has no drift.</a:t>
-            </a:r>
-            <a:endParaRPr lang="en-US" sz="1500" dirty="0"/>
-          </a:p>
-        </p:txBody>
-      </p:sp>
-      <p:sp>
-        <p:nvSpPr>
-          <p:cNvPr id="11" name="Number"/>
+                <a:latin typeface="Cambria" pitchFamily="34" charset="0"/>
+                <a:ea typeface="Cambria" pitchFamily="34" charset="-122"/>
+                <a:cs typeface="Cambria" pitchFamily="34" charset="-120"/>
+              </a:rPr>
+              <a:t>Design on a sample</a:t>
+            </a:r>
+            <a:endParaRPr lang="en-US" sz="1600" dirty="0"/>
+          </a:p>
+        </p:txBody>
+      </p:sp>
+      <p:sp>
+        <p:nvSpPr>
+          <p:cNvPr id="15" name="Flow text"/>
+          <p:cNvSpPr txBox="1"/>
+          <p:nvPr/>
+        </p:nvSpPr>
+        <p:spPr>
+          <a:xfrm>
+            <a:off x="2858963" y="3867912"/>
+            <a:ext cx="2036003" cy="1554480"/>
+          </a:xfrm>
+          <a:prstGeom prst="rect">
+            <a:avLst/>
+          </a:prstGeom>
+          <a:noFill/>
+          <a:ln/>
+        </p:spPr>
+        <p:txBody>
+          <a:bodyPr wrap="square" lIns="0" tIns="0" rIns="0" bIns="0" rtlCol="0" anchor="t"/>
+          <a:lstStyle/>
+          <a:p>
+            <a:pPr algn="ctr" indent="0" marL="0">
+              <a:buNone/>
+            </a:pPr>
+            <a:r>
+              <a:rPr lang="en-US" sz="1400" dirty="0">
+                <a:solidFill>
+                  <a:schemeClr val="tx2"/>
+                </a:solidFill>
+              </a:rPr>
+              <a:t>The cheapest package on the book's paths; then on 1,000 and 10,000.</a:t>
+            </a:r>
+            <a:endParaRPr lang="en-US" sz="1400" dirty="0"/>
+          </a:p>
+        </p:txBody>
+      </p:sp>
+      <p:sp>
+        <p:nvSpPr>
+          <p:cNvPr id="16" name="Number"/>
           <p:cNvSpPr/>
           <p:nvPr/>
         </p:nvSpPr>
         <p:spPr>
           <a:xfrm>
-            <a:off x="548640" y="3529584"/>
-            <a:ext cx="566928" cy="566928"/>
+            <a:off x="5821528" y="2606040"/>
+            <a:ext cx="548640" cy="548640"/>
           </a:xfrm>
           <a:prstGeom prst="ellipse">
             <a:avLst/>
@@ -16032,14 +16266,14 @@
       </p:sp>
       <p:sp>
         <p:nvSpPr>
-          <p:cNvPr id="12" name="Text 9"/>
+          <p:cNvPr id="17" name="Text 13"/>
           <p:cNvSpPr txBox="1"/>
           <p:nvPr/>
         </p:nvSpPr>
         <p:spPr>
           <a:xfrm>
-            <a:off x="548640" y="3529584"/>
-            <a:ext cx="566928" cy="566928"/>
+            <a:off x="5821528" y="2606040"/>
+            <a:ext cx="548640" cy="548640"/>
           </a:xfrm>
           <a:prstGeom prst="rect">
             <a:avLst/>
@@ -16055,7 +16289,7 @@
               <a:buNone/>
             </a:pPr>
             <a:r>
-              <a:rPr lang="en-US" sz="1500" b="1" dirty="0">
+              <a:rPr lang="en-US" sz="1600" b="1" dirty="0">
                 <a:solidFill>
                   <a:schemeClr val="bg1"/>
                 </a:solidFill>
@@ -16065,20 +16299,20 @@
               </a:rPr>
               <a:t>3</a:t>
             </a:r>
-            <a:endParaRPr lang="en-US" sz="1500" dirty="0"/>
-          </a:p>
-        </p:txBody>
-      </p:sp>
-      <p:sp>
-        <p:nvSpPr>
-          <p:cNvPr id="13" name="Row text"/>
+            <a:endParaRPr lang="en-US" sz="1600" dirty="0"/>
+          </a:p>
+        </p:txBody>
+      </p:sp>
+      <p:sp>
+        <p:nvSpPr>
+          <p:cNvPr id="18" name="Flow head"/>
           <p:cNvSpPr txBox="1"/>
           <p:nvPr/>
         </p:nvSpPr>
         <p:spPr>
           <a:xfrm>
-            <a:off x="1325880" y="3483864"/>
-            <a:ext cx="10317175" cy="841248"/>
+            <a:off x="5059558" y="3291840"/>
+            <a:ext cx="2072579" cy="548640"/>
           </a:xfrm>
           <a:prstGeom prst="rect">
             <a:avLst/>
@@ -16087,34 +16321,73 @@
           <a:ln/>
         </p:spPr>
         <p:txBody>
-          <a:bodyPr wrap="square" lIns="0" tIns="0" rIns="0" bIns="0" rtlCol="0" anchor="ctr"/>
-          <a:lstStyle/>
-          <a:p>
-            <a:pPr indent="0" marL="0">
+          <a:bodyPr wrap="square" lIns="0" tIns="0" rIns="0" bIns="0" rtlCol="0" anchor="t"/>
+          <a:lstStyle/>
+          <a:p>
+            <a:pPr algn="ctr" indent="0" marL="0">
               <a:buNone/>
             </a:pPr>
             <a:r>
-              <a:rPr lang="en-US" sz="1500" dirty="0">
+              <a:rPr lang="en-US" sz="1600" b="1" dirty="0">
                 <a:solidFill>
                   <a:schemeClr val="tx1"/>
                 </a:solidFill>
-              </a:rPr>
-              <a:t>Events that only add to the stocks leave a linear–quadratic rule unchanged and cost money. Uncertainty about what a decision achieves calls for gentler steering; risk that grows with the stocks, or doubt about the law, for harder steering. Risk aversion and distrust of the law are one penalty.</a:t>
-            </a:r>
-            <a:endParaRPr lang="en-US" sz="1500" dirty="0"/>
-          </a:p>
-        </p:txBody>
-      </p:sp>
-      <p:sp>
-        <p:nvSpPr>
-          <p:cNvPr id="14" name="Number"/>
+                <a:latin typeface="Cambria" pitchFamily="34" charset="0"/>
+                <a:ea typeface="Cambria" pitchFamily="34" charset="-122"/>
+                <a:cs typeface="Cambria" pitchFamily="34" charset="-120"/>
+              </a:rPr>
+              <a:t>Compare rules</a:t>
+            </a:r>
+            <a:endParaRPr lang="en-US" sz="1600" dirty="0"/>
+          </a:p>
+        </p:txBody>
+      </p:sp>
+      <p:sp>
+        <p:nvSpPr>
+          <p:cNvPr id="19" name="Flow text"/>
+          <p:cNvSpPr txBox="1"/>
+          <p:nvPr/>
+        </p:nvSpPr>
+        <p:spPr>
+          <a:xfrm>
+            <a:off x="5077846" y="3867912"/>
+            <a:ext cx="2036003" cy="1554480"/>
+          </a:xfrm>
+          <a:prstGeom prst="rect">
+            <a:avLst/>
+          </a:prstGeom>
+          <a:noFill/>
+          <a:ln/>
+        </p:spPr>
+        <p:txBody>
+          <a:bodyPr wrap="square" lIns="0" tIns="0" rIns="0" bIns="0" rtlCol="0" anchor="t"/>
+          <a:lstStyle/>
+          <a:p>
+            <a:pPr algn="ctr" indent="0" marL="0">
+              <a:buNone/>
+            </a:pPr>
+            <a:r>
+              <a:rPr lang="en-US" sz="1400" dirty="0">
+                <a:solidFill>
+                  <a:schemeClr val="tx2"/>
+                </a:solidFill>
+              </a:rPr>
+              <a:t>Under common random numbers: the package against reading cash.</a:t>
+            </a:r>
+            <a:endParaRPr lang="en-US" sz="1400" dirty="0"/>
+          </a:p>
+        </p:txBody>
+      </p:sp>
+      <p:sp>
+        <p:nvSpPr>
+          <p:cNvPr id="20" name="Number"/>
           <p:cNvSpPr/>
           <p:nvPr/>
         </p:nvSpPr>
         <p:spPr>
           <a:xfrm>
-            <a:off x="548640" y="4425696"/>
-            <a:ext cx="566928" cy="566928"/>
+            <a:off x="8040411" y="2606040"/>
+            <a:ext cx="548640" cy="548640"/>
           </a:xfrm>
           <a:prstGeom prst="ellipse">
             <a:avLst/>
@@ -16132,14 +16405,14 @@
       </p:sp>
       <p:sp>
         <p:nvSpPr>
-          <p:cNvPr id="15" name="Text 12"/>
+          <p:cNvPr id="21" name="Text 17"/>
           <p:cNvSpPr txBox="1"/>
           <p:nvPr/>
         </p:nvSpPr>
         <p:spPr>
           <a:xfrm>
-            <a:off x="548640" y="4425696"/>
-            <a:ext cx="566928" cy="566928"/>
+            <a:off x="8040411" y="2606040"/>
+            <a:ext cx="548640" cy="548640"/>
           </a:xfrm>
           <a:prstGeom prst="rect">
             <a:avLst/>
@@ -16155,7 +16428,7 @@
               <a:buNone/>
             </a:pPr>
             <a:r>
-              <a:rPr lang="en-US" sz="1500" b="1" dirty="0">
+              <a:rPr lang="en-US" sz="1600" b="1" dirty="0">
                 <a:solidFill>
                   <a:schemeClr val="bg1"/>
                 </a:solidFill>
@@ -16165,20 +16438,20 @@
               </a:rPr>
               <a:t>4</a:t>
             </a:r>
-            <a:endParaRPr lang="en-US" sz="1500" dirty="0"/>
-          </a:p>
-        </p:txBody>
-      </p:sp>
-      <p:sp>
-        <p:nvSpPr>
-          <p:cNvPr id="16" name="Row text"/>
+            <a:endParaRPr lang="en-US" sz="1600" dirty="0"/>
+          </a:p>
+        </p:txBody>
+      </p:sp>
+      <p:sp>
+        <p:nvSpPr>
+          <p:cNvPr id="22" name="Flow head"/>
           <p:cNvSpPr txBox="1"/>
           <p:nvPr/>
         </p:nvSpPr>
         <p:spPr>
           <a:xfrm>
-            <a:off x="1325880" y="4379976"/>
-            <a:ext cx="10317175" cy="841248"/>
+            <a:off x="7278441" y="3291840"/>
+            <a:ext cx="2072579" cy="548640"/>
           </a:xfrm>
           <a:prstGeom prst="rect">
             <a:avLst/>
@@ -16187,34 +16460,73 @@
           <a:ln/>
         </p:spPr>
         <p:txBody>
-          <a:bodyPr wrap="square" lIns="0" tIns="0" rIns="0" bIns="0" rtlCol="0" anchor="ctr"/>
-          <a:lstStyle/>
-          <a:p>
-            <a:pPr indent="0" marL="0">
+          <a:bodyPr wrap="square" lIns="0" tIns="0" rIns="0" bIns="0" rtlCol="0" anchor="t"/>
+          <a:lstStyle/>
+          <a:p>
+            <a:pPr algn="ctr" indent="0" marL="0">
               <a:buNone/>
             </a:pPr>
             <a:r>
-              <a:rPr lang="en-US" sz="1500" dirty="0">
+              <a:rPr lang="en-US" sz="1600" b="1" dirty="0">
                 <a:solidFill>
                   <a:schemeClr val="tx1"/>
                 </a:solidFill>
-              </a:rPr>
-              <a:t>A commitment over many reviews is a joint chance constraint, whose chance lies between the worst review's and the sum. Quantile forms are exact and CVaR is convex and safe. Information never hurts, and the clairvoyant bounds what any of it is worth.</a:t>
-            </a:r>
-            <a:endParaRPr lang="en-US" sz="1500" dirty="0"/>
-          </a:p>
-        </p:txBody>
-      </p:sp>
-      <p:sp>
-        <p:nvSpPr>
-          <p:cNvPr id="17" name="Number"/>
+                <a:latin typeface="Cambria" pitchFamily="34" charset="0"/>
+                <a:ea typeface="Cambria" pitchFamily="34" charset="-122"/>
+                <a:cs typeface="Cambria" pitchFamily="34" charset="-120"/>
+              </a:rPr>
+              <a:t>Price information</a:t>
+            </a:r>
+            <a:endParaRPr lang="en-US" sz="1600" dirty="0"/>
+          </a:p>
+        </p:txBody>
+      </p:sp>
+      <p:sp>
+        <p:nvSpPr>
+          <p:cNvPr id="23" name="Flow text"/>
+          <p:cNvSpPr txBox="1"/>
+          <p:nvPr/>
+        </p:nvSpPr>
+        <p:spPr>
+          <a:xfrm>
+            <a:off x="7296729" y="3867912"/>
+            <a:ext cx="2036003" cy="1554480"/>
+          </a:xfrm>
+          <a:prstGeom prst="rect">
+            <a:avLst/>
+          </a:prstGeom>
+          <a:noFill/>
+          <a:ln/>
+        </p:spPr>
+        <p:txBody>
+          <a:bodyPr wrap="square" lIns="0" tIns="0" rIns="0" bIns="0" rtlCol="0" anchor="t"/>
+          <a:lstStyle/>
+          <a:p>
+            <a:pPr algn="ctr" indent="0" marL="0">
+              <a:buNone/>
+            </a:pPr>
+            <a:r>
+              <a:rPr lang="en-US" sz="1400" dirty="0">
+                <a:solidFill>
+                  <a:schemeClr val="tx2"/>
+                </a:solidFill>
+              </a:rPr>
+              <a:t>The clairvoyant's bound and an early warning of closures.</a:t>
+            </a:r>
+            <a:endParaRPr lang="en-US" sz="1400" dirty="0"/>
+          </a:p>
+        </p:txBody>
+      </p:sp>
+      <p:sp>
+        <p:nvSpPr>
+          <p:cNvPr id="24" name="Number"/>
           <p:cNvSpPr/>
           <p:nvPr/>
         </p:nvSpPr>
         <p:spPr>
           <a:xfrm>
-            <a:off x="548640" y="5321808"/>
-            <a:ext cx="566928" cy="566928"/>
+            <a:off x="10259294" y="2606040"/>
+            <a:ext cx="548640" cy="548640"/>
           </a:xfrm>
           <a:prstGeom prst="ellipse">
             <a:avLst/>
@@ -16232,14 +16544,14 @@
       </p:sp>
       <p:sp>
         <p:nvSpPr>
-          <p:cNvPr id="18" name="Text 15"/>
+          <p:cNvPr id="25" name="Text 21"/>
           <p:cNvSpPr txBox="1"/>
           <p:nvPr/>
         </p:nvSpPr>
         <p:spPr>
           <a:xfrm>
-            <a:off x="548640" y="5321808"/>
-            <a:ext cx="566928" cy="566928"/>
+            <a:off x="10259294" y="2606040"/>
+            <a:ext cx="548640" cy="548640"/>
           </a:xfrm>
           <a:prstGeom prst="rect">
             <a:avLst/>
@@ -16255,7 +16567,7 @@
               <a:buNone/>
             </a:pPr>
             <a:r>
-              <a:rPr lang="en-US" sz="1500" b="1" dirty="0">
+              <a:rPr lang="en-US" sz="1600" b="1" dirty="0">
                 <a:solidFill>
                   <a:schemeClr val="bg1"/>
                 </a:solidFill>
@@ -16265,20 +16577,20 @@
               </a:rPr>
               <a:t>5</a:t>
             </a:r>
-            <a:endParaRPr lang="en-US" sz="1500" dirty="0"/>
-          </a:p>
-        </p:txBody>
-      </p:sp>
-      <p:sp>
-        <p:nvSpPr>
-          <p:cNvPr id="19" name="Row text"/>
+            <a:endParaRPr lang="en-US" sz="1600" dirty="0"/>
+          </a:p>
+        </p:txBody>
+      </p:sp>
+      <p:sp>
+        <p:nvSpPr>
+          <p:cNvPr id="26" name="Flow head"/>
           <p:cNvSpPr txBox="1"/>
           <p:nvPr/>
         </p:nvSpPr>
         <p:spPr>
           <a:xfrm>
-            <a:off x="1325880" y="5276088"/>
-            <a:ext cx="10317175" cy="841248"/>
+            <a:off x="9497324" y="3291840"/>
+            <a:ext cx="2072579" cy="548640"/>
           </a:xfrm>
           <a:prstGeom prst="rect">
             <a:avLst/>
@@ -16287,6 +16599,108 @@
           <a:ln/>
         </p:spPr>
         <p:txBody>
+          <a:bodyPr wrap="square" lIns="0" tIns="0" rIns="0" bIns="0" rtlCol="0" anchor="t"/>
+          <a:lstStyle/>
+          <a:p>
+            <a:pPr algn="ctr" indent="0" marL="0">
+              <a:buNone/>
+            </a:pPr>
+            <a:r>
+              <a:rPr lang="en-US" sz="1600" b="1" dirty="0">
+                <a:solidFill>
+                  <a:schemeClr val="tx1"/>
+                </a:solidFill>
+                <a:latin typeface="Cambria" pitchFamily="34" charset="0"/>
+                <a:ea typeface="Cambria" pitchFamily="34" charset="-122"/>
+                <a:cs typeface="Cambria" pitchFamily="34" charset="-120"/>
+              </a:rPr>
+              <a:t>Steer with outside events</a:t>
+            </a:r>
+            <a:endParaRPr lang="en-US" sz="1600" dirty="0"/>
+          </a:p>
+        </p:txBody>
+      </p:sp>
+      <p:sp>
+        <p:nvSpPr>
+          <p:cNvPr id="27" name="Flow text"/>
+          <p:cNvSpPr txBox="1"/>
+          <p:nvPr/>
+        </p:nvSpPr>
+        <p:spPr>
+          <a:xfrm>
+            <a:off x="9515612" y="3867912"/>
+            <a:ext cx="2036003" cy="1554480"/>
+          </a:xfrm>
+          <a:prstGeom prst="rect">
+            <a:avLst/>
+          </a:prstGeom>
+          <a:noFill/>
+          <a:ln/>
+        </p:spPr>
+        <p:txBody>
+          <a:bodyPr wrap="square" lIns="0" tIns="0" rIns="0" bIns="0" rtlCol="0" anchor="t"/>
+          <a:lstStyle/>
+          <a:p>
+            <a:pPr algn="ctr" indent="0" marL="0">
+              <a:buNone/>
+            </a:pPr>
+            <a:r>
+              <a:rPr lang="en-US" sz="1400" dirty="0">
+                <a:solidFill>
+                  <a:schemeClr val="tx2"/>
+                </a:solidFill>
+              </a:rPr>
+              <a:t>Departures and an uncertain yield; the martingale audit.</a:t>
+            </a:r>
+            <a:endParaRPr lang="en-US" sz="1400" dirty="0"/>
+          </a:p>
+        </p:txBody>
+      </p:sp>
+      <p:sp>
+        <p:nvSpPr>
+          <p:cNvPr id="28" name="Deliverable card"/>
+          <p:cNvSpPr/>
+          <p:nvPr/>
+        </p:nvSpPr>
+        <p:spPr>
+          <a:xfrm>
+            <a:off x="548640" y="5486400"/>
+            <a:ext cx="11094415" cy="685800"/>
+          </a:xfrm>
+          <a:prstGeom prst="roundRect">
+            <a:avLst>
+              <a:gd name="adj" fmla="val 10667"/>
+            </a:avLst>
+          </a:prstGeom>
+          <a:solidFill>
+            <a:schemeClr val="bg2"/>
+          </a:solidFill>
+          <a:ln w="9525">
+            <a:solidFill>
+              <a:srgbClr val="C4CBD8"/>
+            </a:solidFill>
+            <a:prstDash val="solid"/>
+          </a:ln>
+        </p:spPr>
+      </p:sp>
+      <p:sp>
+        <p:nvSpPr>
+          <p:cNvPr id="29" name="Deliverable"/>
+          <p:cNvSpPr txBox="1"/>
+          <p:nvPr/>
+        </p:nvSpPr>
+        <p:spPr>
+          <a:xfrm>
+            <a:off x="777240" y="5559552"/>
+            <a:ext cx="10637215" cy="539496"/>
+          </a:xfrm>
+          <a:prstGeom prst="rect">
+            <a:avLst/>
+          </a:prstGeom>
+          <a:noFill/>
+          <a:ln/>
+        </p:spPr>
+        <p:txBody>
           <a:bodyPr wrap="square" lIns="0" tIns="0" rIns="0" bIns="0" rtlCol="0" anchor="ctr"/>
           <a:lstStyle/>
           <a:p>
@@ -16294,14 +16708,22 @@
               <a:buNone/>
             </a:pPr>
             <a:r>
-              <a:rPr lang="en-US" sz="1500" dirty="0">
+              <a:rPr lang="en-US" sz="1400" b="1" dirty="0">
                 <a:solidFill>
                   <a:schemeClr val="tx1"/>
                 </a:solidFill>
               </a:rPr>
-              <a:t>Answers computed from samples carry two errors, the estimate's and the design's. Sample average approximation is consistent but optimistic: judge an answer on fresh paths, with a margin priced by the sample's size.</a:t>
-            </a:r>
-            <a:endParaRPr lang="en-US" sz="1500" dirty="0"/>
+              <a:t>Deliverable:</a:t>
+            </a:r>
+            <a:r>
+              <a:rPr lang="en-US" sz="1400" dirty="0">
+                <a:solidFill>
+                  <a:schemeClr val="tx1"/>
+                </a:solidFill>
+              </a:rPr>
+              <a:t> a one-page note to the board: the package or rule, its cost and its chance of a breach on fresh paths with their errors, the value of information, and the declarations the answer rests on. About 75 minutes.</a:t>
+            </a:r>
+            <a:endParaRPr lang="en-US" sz="1400" dirty="0"/>
           </a:p>
         </p:txBody>
       </p:sp>
@@ -16407,7 +16829,7 @@
                   <a:schemeClr val="accent1"/>
                 </a:solidFill>
               </a:rPr>
-              <a:t>THIS WEEK'S LABORATORY</a:t>
+              <a:t>KEY TAKEAWAYS</a:t>
             </a:r>
             <a:endParaRPr lang="en-US" sz="1200" dirty="0"/>
           </a:p>
@@ -16448,7 +16870,7 @@
                 <a:ea typeface="Cambria" pitchFamily="34" charset="-122"/>
                 <a:cs typeface="Cambria" pitchFamily="34" charset="-120"/>
               </a:rPr>
-              <a:t>Notebook and workbook reproduce the book</a:t>
+              <a:t>What to carry forward</a:t>
             </a:r>
             <a:endParaRPr lang="en-US" sz="3200" dirty="0"/>
           </a:p>
@@ -16456,26 +16878,24 @@
       </p:sp>
       <p:sp>
         <p:nvSpPr>
-          <p:cNvPr id="5" name="Stat card"/>
+          <p:cNvPr id="5" name="Number"/>
           <p:cNvSpPr/>
           <p:nvPr/>
         </p:nvSpPr>
         <p:spPr>
           <a:xfrm>
-            <a:off x="548640" y="1691640"/>
-            <a:ext cx="2567864" cy="1691640"/>
-          </a:xfrm>
-          <a:prstGeom prst="roundRect">
-            <a:avLst>
-              <a:gd name="adj" fmla="val 4324"/>
-            </a:avLst>
+            <a:off x="548640" y="1737360"/>
+            <a:ext cx="566928" cy="566928"/>
+          </a:xfrm>
+          <a:prstGeom prst="ellipse">
+            <a:avLst/>
           </a:prstGeom>
           <a:solidFill>
-            <a:schemeClr val="tx1"/>
+            <a:schemeClr val="accent1"/>
           </a:solidFill>
-          <a:ln w="9525">
+          <a:ln w="6350">
             <a:solidFill>
-              <a:srgbClr val="0F1E3D"/>
+              <a:schemeClr val="accent1"/>
             </a:solidFill>
             <a:prstDash val="solid"/>
           </a:ln>
@@ -16483,14 +16903,14 @@
       </p:sp>
       <p:sp>
         <p:nvSpPr>
-          <p:cNvPr id="6" name="Stat value"/>
+          <p:cNvPr id="6" name="Text 3"/>
           <p:cNvSpPr txBox="1"/>
           <p:nvPr/>
         </p:nvSpPr>
         <p:spPr>
           <a:xfrm>
-            <a:off x="685800" y="1801368"/>
-            <a:ext cx="2293544" cy="914400"/>
+            <a:off x="548640" y="1737360"/>
+            <a:ext cx="566928" cy="566928"/>
           </a:xfrm>
           <a:prstGeom prst="rect">
             <a:avLst/>
@@ -16506,30 +16926,30 @@
               <a:buNone/>
             </a:pPr>
             <a:r>
-              <a:rPr lang="en-US" sz="4400" b="1" dirty="0">
-                <a:solidFill>
-                  <a:schemeClr val="accent1"/>
-                </a:solidFill>
-                <a:latin typeface="Cambria" pitchFamily="34" charset="0"/>
-                <a:ea typeface="Cambria" pitchFamily="34" charset="-122"/>
-                <a:cs typeface="Cambria" pitchFamily="34" charset="-120"/>
-              </a:rPr>
-              <a:t>169</a:t>
-            </a:r>
-            <a:endParaRPr lang="en-US" sz="4400" dirty="0"/>
-          </a:p>
-        </p:txBody>
-      </p:sp>
-      <p:sp>
-        <p:nvSpPr>
-          <p:cNvPr id="7" name="Stat label"/>
+              <a:rPr lang="en-US" sz="1500" b="1" dirty="0">
+                <a:solidFill>
+                  <a:schemeClr val="bg1"/>
+                </a:solidFill>
+                <a:latin typeface="Calibri" pitchFamily="34" charset="0"/>
+                <a:ea typeface="Calibri" pitchFamily="34" charset="-122"/>
+                <a:cs typeface="Calibri" pitchFamily="34" charset="-120"/>
+              </a:rPr>
+              <a:t>1</a:t>
+            </a:r>
+            <a:endParaRPr lang="en-US" sz="1500" dirty="0"/>
+          </a:p>
+        </p:txBody>
+      </p:sp>
+      <p:sp>
+        <p:nvSpPr>
+          <p:cNvPr id="7" name="Row text"/>
           <p:cNvSpPr txBox="1"/>
           <p:nvPr/>
         </p:nvSpPr>
         <p:spPr>
           <a:xfrm>
-            <a:off x="685800" y="2697480"/>
-            <a:ext cx="2293544" cy="612648"/>
+            <a:off x="1325880" y="1691640"/>
+            <a:ext cx="10317175" cy="841248"/>
           </a:xfrm>
           <a:prstGeom prst="rect">
             <a:avLst/>
@@ -16538,46 +16958,44 @@
           <a:ln/>
         </p:spPr>
         <p:txBody>
-          <a:bodyPr wrap="square" lIns="0" tIns="0" rIns="0" bIns="0" rtlCol="0" anchor="t"/>
-          <a:lstStyle/>
-          <a:p>
-            <a:pPr algn="ctr" indent="0" marL="0">
+          <a:bodyPr wrap="square" lIns="0" tIns="0" rIns="0" bIns="0" rtlCol="0" anchor="ctr"/>
+          <a:lstStyle/>
+          <a:p>
+            <a:pPr indent="0" marL="0">
               <a:buNone/>
             </a:pPr>
             <a:r>
-              <a:rPr lang="en-US" sz="1400" dirty="0">
-                <a:solidFill>
-                  <a:schemeClr val="bg2"/>
-                </a:solidFill>
-              </a:rPr>
-              <a:t>notebook checkpoints, every one PASS</a:t>
-            </a:r>
-            <a:endParaRPr lang="en-US" sz="1400" dirty="0"/>
-          </a:p>
-        </p:txBody>
-      </p:sp>
-      <p:sp>
-        <p:nvSpPr>
-          <p:cNvPr id="8" name="Stat card"/>
+              <a:rPr lang="en-US" sz="1500" dirty="0">
+                <a:solidFill>
+                  <a:schemeClr val="tx1"/>
+                </a:solidFill>
+              </a:rPr>
+              <a:t>Declaring a probability law turns the objective into an expected value, a commitment into one kept on every path, on average, or with a stated probability, and a decision into a rule that reads only what has been revealed. The average path is not a plan.</a:t>
+            </a:r>
+            <a:endParaRPr lang="en-US" sz="1500" dirty="0"/>
+          </a:p>
+        </p:txBody>
+      </p:sp>
+      <p:sp>
+        <p:nvSpPr>
+          <p:cNvPr id="8" name="Number"/>
           <p:cNvSpPr/>
           <p:nvPr/>
         </p:nvSpPr>
         <p:spPr>
           <a:xfrm>
-            <a:off x="3390824" y="1691640"/>
-            <a:ext cx="2567864" cy="1691640"/>
-          </a:xfrm>
-          <a:prstGeom prst="roundRect">
-            <a:avLst>
-              <a:gd name="adj" fmla="val 4324"/>
-            </a:avLst>
+            <a:off x="548640" y="2633472"/>
+            <a:ext cx="566928" cy="566928"/>
+          </a:xfrm>
+          <a:prstGeom prst="ellipse">
+            <a:avLst/>
           </a:prstGeom>
           <a:solidFill>
-            <a:schemeClr val="bg2"/>
+            <a:schemeClr val="accent1"/>
           </a:solidFill>
-          <a:ln w="9525">
+          <a:ln w="6350">
             <a:solidFill>
-              <a:srgbClr val="C4CBD8"/>
+              <a:schemeClr val="accent1"/>
             </a:solidFill>
             <a:prstDash val="solid"/>
           </a:ln>
@@ -16585,14 +17003,14 @@
       </p:sp>
       <p:sp>
         <p:nvSpPr>
-          <p:cNvPr id="9" name="Stat value"/>
+          <p:cNvPr id="9" name="Text 6"/>
           <p:cNvSpPr txBox="1"/>
           <p:nvPr/>
         </p:nvSpPr>
         <p:spPr>
           <a:xfrm>
-            <a:off x="3527984" y="1801368"/>
-            <a:ext cx="2293544" cy="914400"/>
+            <a:off x="548640" y="2633472"/>
+            <a:ext cx="566928" cy="566928"/>
           </a:xfrm>
           <a:prstGeom prst="rect">
             <a:avLst/>
@@ -16608,30 +17026,30 @@
               <a:buNone/>
             </a:pPr>
             <a:r>
-              <a:rPr lang="en-US" sz="4400" b="1" dirty="0">
-                <a:solidFill>
-                  <a:schemeClr val="tx1"/>
-                </a:solidFill>
-                <a:latin typeface="Cambria" pitchFamily="34" charset="0"/>
-                <a:ea typeface="Cambria" pitchFamily="34" charset="-122"/>
-                <a:cs typeface="Cambria" pitchFamily="34" charset="-120"/>
-              </a:rPr>
-              <a:t>87</a:t>
-            </a:r>
-            <a:endParaRPr lang="en-US" sz="4400" dirty="0"/>
-          </a:p>
-        </p:txBody>
-      </p:sp>
-      <p:sp>
-        <p:nvSpPr>
-          <p:cNvPr id="10" name="Stat label"/>
+              <a:rPr lang="en-US" sz="1500" b="1" dirty="0">
+                <a:solidFill>
+                  <a:schemeClr val="bg1"/>
+                </a:solidFill>
+                <a:latin typeface="Calibri" pitchFamily="34" charset="0"/>
+                <a:ea typeface="Calibri" pitchFamily="34" charset="-122"/>
+                <a:cs typeface="Calibri" pitchFamily="34" charset="-120"/>
+              </a:rPr>
+              <a:t>2</a:t>
+            </a:r>
+            <a:endParaRPr lang="en-US" sz="1500" dirty="0"/>
+          </a:p>
+        </p:txBody>
+      </p:sp>
+      <p:sp>
+        <p:nvSpPr>
+          <p:cNvPr id="10" name="Row text"/>
           <p:cNvSpPr txBox="1"/>
           <p:nvPr/>
         </p:nvSpPr>
         <p:spPr>
           <a:xfrm>
-            <a:off x="3527984" y="2697480"/>
-            <a:ext cx="2293544" cy="612648"/>
+            <a:off x="1325880" y="2587752"/>
+            <a:ext cx="10317175" cy="841248"/>
           </a:xfrm>
           <a:prstGeom prst="rect">
             <a:avLst/>
@@ -16640,46 +17058,44 @@
           <a:ln/>
         </p:spPr>
         <p:txBody>
-          <a:bodyPr wrap="square" lIns="0" tIns="0" rIns="0" bIns="0" rtlCol="0" anchor="t"/>
-          <a:lstStyle/>
-          <a:p>
-            <a:pPr algn="ctr" indent="0" marL="0">
+          <a:bodyPr wrap="square" lIns="0" tIns="0" rIns="0" bIns="0" rtlCol="0" anchor="ctr"/>
+          <a:lstStyle/>
+          <a:p>
+            <a:pPr indent="0" marL="0">
               <a:buNone/>
             </a:pPr>
             <a:r>
-              <a:rPr lang="en-US" sz="1400" dirty="0">
-                <a:solidFill>
-                  <a:schemeClr val="tx2"/>
-                </a:solidFill>
-              </a:rPr>
-              <a:t>workbook checks against the engine, ALL PASS</a:t>
-            </a:r>
-            <a:endParaRPr lang="en-US" sz="1400" dirty="0"/>
-          </a:p>
-        </p:txBody>
-      </p:sp>
-      <p:sp>
-        <p:nvSpPr>
-          <p:cNvPr id="11" name="Stat card"/>
+              <a:rPr lang="en-US" sz="1500" dirty="0">
+                <a:solidFill>
+                  <a:schemeClr val="tx1"/>
+                </a:solidFill>
+              </a:rPr>
+              <a:t>With outside events, the HJB equation gains half their spread priced at the value's curvature. Verification carries over in expectation, and along the best rule the value ledger has no drift.</a:t>
+            </a:r>
+            <a:endParaRPr lang="en-US" sz="1500" dirty="0"/>
+          </a:p>
+        </p:txBody>
+      </p:sp>
+      <p:sp>
+        <p:nvSpPr>
+          <p:cNvPr id="11" name="Number"/>
           <p:cNvSpPr/>
           <p:nvPr/>
         </p:nvSpPr>
         <p:spPr>
           <a:xfrm>
-            <a:off x="6233008" y="1691640"/>
-            <a:ext cx="2567864" cy="1691640"/>
-          </a:xfrm>
-          <a:prstGeom prst="roundRect">
-            <a:avLst>
-              <a:gd name="adj" fmla="val 4324"/>
-            </a:avLst>
+            <a:off x="548640" y="3529584"/>
+            <a:ext cx="566928" cy="566928"/>
+          </a:xfrm>
+          <a:prstGeom prst="ellipse">
+            <a:avLst/>
           </a:prstGeom>
           <a:solidFill>
-            <a:schemeClr val="bg2"/>
+            <a:schemeClr val="accent1"/>
           </a:solidFill>
-          <a:ln w="9525">
+          <a:ln w="6350">
             <a:solidFill>
-              <a:srgbClr val="C4CBD8"/>
+              <a:schemeClr val="accent1"/>
             </a:solidFill>
             <a:prstDash val="solid"/>
           </a:ln>
@@ -16687,14 +17103,14 @@
       </p:sp>
       <p:sp>
         <p:nvSpPr>
-          <p:cNvPr id="12" name="Stat value"/>
+          <p:cNvPr id="12" name="Text 9"/>
           <p:cNvSpPr txBox="1"/>
           <p:nvPr/>
         </p:nvSpPr>
         <p:spPr>
           <a:xfrm>
-            <a:off x="6370168" y="1801368"/>
-            <a:ext cx="2293544" cy="914400"/>
+            <a:off x="548640" y="3529584"/>
+            <a:ext cx="566928" cy="566928"/>
           </a:xfrm>
           <a:prstGeom prst="rect">
             <a:avLst/>
@@ -16710,30 +17126,30 @@
               <a:buNone/>
             </a:pPr>
             <a:r>
-              <a:rPr lang="en-US" sz="4400" b="1" dirty="0">
-                <a:solidFill>
-                  <a:schemeClr val="tx1"/>
-                </a:solidFill>
-                <a:latin typeface="Cambria" pitchFamily="34" charset="0"/>
-                <a:ea typeface="Cambria" pitchFamily="34" charset="-122"/>
-                <a:cs typeface="Cambria" pitchFamily="34" charset="-120"/>
-              </a:rPr>
-              <a:t>26209</a:t>
-            </a:r>
-            <a:endParaRPr lang="en-US" sz="4400" dirty="0"/>
-          </a:p>
-        </p:txBody>
-      </p:sp>
-      <p:sp>
-        <p:nvSpPr>
-          <p:cNvPr id="13" name="Stat label"/>
+              <a:rPr lang="en-US" sz="1500" b="1" dirty="0">
+                <a:solidFill>
+                  <a:schemeClr val="bg1"/>
+                </a:solidFill>
+                <a:latin typeface="Calibri" pitchFamily="34" charset="0"/>
+                <a:ea typeface="Calibri" pitchFamily="34" charset="-122"/>
+                <a:cs typeface="Calibri" pitchFamily="34" charset="-120"/>
+              </a:rPr>
+              <a:t>3</a:t>
+            </a:r>
+            <a:endParaRPr lang="en-US" sz="1500" dirty="0"/>
+          </a:p>
+        </p:txBody>
+      </p:sp>
+      <p:sp>
+        <p:nvSpPr>
+          <p:cNvPr id="13" name="Row text"/>
           <p:cNvSpPr txBox="1"/>
           <p:nvPr/>
         </p:nvSpPr>
         <p:spPr>
           <a:xfrm>
-            <a:off x="6370168" y="2697480"/>
-            <a:ext cx="2293544" cy="612648"/>
+            <a:off x="1325880" y="3483864"/>
+            <a:ext cx="10317175" cy="841248"/>
           </a:xfrm>
           <a:prstGeom prst="rect">
             <a:avLst/>
@@ -16742,46 +17158,44 @@
           <a:ln/>
         </p:spPr>
         <p:txBody>
-          <a:bodyPr wrap="square" lIns="0" tIns="0" rIns="0" bIns="0" rtlCol="0" anchor="t"/>
-          <a:lstStyle/>
-          <a:p>
-            <a:pPr algn="ctr" indent="0" marL="0">
+          <a:bodyPr wrap="square" lIns="0" tIns="0" rIns="0" bIns="0" rtlCol="0" anchor="ctr"/>
+          <a:lstStyle/>
+          <a:p>
+            <a:pPr indent="0" marL="0">
               <a:buNone/>
             </a:pPr>
             <a:r>
-              <a:rPr lang="en-US" sz="1400" dirty="0">
-                <a:solidFill>
-                  <a:schemeClr val="tx2"/>
-                </a:solidFill>
-              </a:rPr>
-              <a:t>the lab's seed</a:t>
-            </a:r>
-            <a:endParaRPr lang="en-US" sz="1400" dirty="0"/>
-          </a:p>
-        </p:txBody>
-      </p:sp>
-      <p:sp>
-        <p:nvSpPr>
-          <p:cNvPr id="14" name="Stat card"/>
+              <a:rPr lang="en-US" sz="1500" dirty="0">
+                <a:solidFill>
+                  <a:schemeClr val="tx1"/>
+                </a:solidFill>
+              </a:rPr>
+              <a:t>Events that only add to the stocks leave a linear–quadratic rule unchanged and cost money. Uncertainty about what a decision achieves calls for gentler steering; risk that grows with the stocks, or doubt about the law, for harder steering. Risk aversion and distrust of the law are one penalty.</a:t>
+            </a:r>
+            <a:endParaRPr lang="en-US" sz="1500" dirty="0"/>
+          </a:p>
+        </p:txBody>
+      </p:sp>
+      <p:sp>
+        <p:nvSpPr>
+          <p:cNvPr id="14" name="Number"/>
           <p:cNvSpPr/>
           <p:nvPr/>
         </p:nvSpPr>
         <p:spPr>
           <a:xfrm>
-            <a:off x="9075191" y="1691640"/>
-            <a:ext cx="2567864" cy="1691640"/>
-          </a:xfrm>
-          <a:prstGeom prst="roundRect">
-            <a:avLst>
-              <a:gd name="adj" fmla="val 4324"/>
-            </a:avLst>
+            <a:off x="548640" y="4425696"/>
+            <a:ext cx="566928" cy="566928"/>
+          </a:xfrm>
+          <a:prstGeom prst="ellipse">
+            <a:avLst/>
           </a:prstGeom>
           <a:solidFill>
-            <a:schemeClr val="bg2"/>
+            <a:schemeClr val="accent1"/>
           </a:solidFill>
-          <a:ln w="9525">
+          <a:ln w="6350">
             <a:solidFill>
-              <a:srgbClr val="C4CBD8"/>
+              <a:schemeClr val="accent1"/>
             </a:solidFill>
             <a:prstDash val="solid"/>
           </a:ln>
@@ -16789,14 +17203,14 @@
       </p:sp>
       <p:sp>
         <p:nvSpPr>
-          <p:cNvPr id="15" name="Stat value"/>
+          <p:cNvPr id="15" name="Text 12"/>
           <p:cNvSpPr txBox="1"/>
           <p:nvPr/>
         </p:nvSpPr>
         <p:spPr>
           <a:xfrm>
-            <a:off x="9212351" y="1801368"/>
-            <a:ext cx="2293544" cy="914400"/>
+            <a:off x="548640" y="4425696"/>
+            <a:ext cx="566928" cy="566928"/>
           </a:xfrm>
           <a:prstGeom prst="rect">
             <a:avLst/>
@@ -16812,30 +17226,30 @@
               <a:buNone/>
             </a:pPr>
             <a:r>
-              <a:rPr lang="en-US" sz="3000" b="1" dirty="0">
-                <a:solidFill>
-                  <a:schemeClr val="tx1"/>
-                </a:solidFill>
-                <a:latin typeface="Cambria" pitchFamily="34" charset="0"/>
-                <a:ea typeface="Cambria" pitchFamily="34" charset="-122"/>
-                <a:cs typeface="Cambria" pitchFamily="34" charset="-120"/>
-              </a:rPr>
-              <a:t>AXIOM-09</a:t>
-            </a:r>
-            <a:endParaRPr lang="en-US" sz="3000" dirty="0"/>
-          </a:p>
-        </p:txBody>
-      </p:sp>
-      <p:sp>
-        <p:nvSpPr>
-          <p:cNvPr id="16" name="Stat label"/>
+              <a:rPr lang="en-US" sz="1500" b="1" dirty="0">
+                <a:solidFill>
+                  <a:schemeClr val="bg1"/>
+                </a:solidFill>
+                <a:latin typeface="Calibri" pitchFamily="34" charset="0"/>
+                <a:ea typeface="Calibri" pitchFamily="34" charset="-122"/>
+                <a:cs typeface="Calibri" pitchFamily="34" charset="-120"/>
+              </a:rPr>
+              <a:t>4</a:t>
+            </a:r>
+            <a:endParaRPr lang="en-US" sz="1500" dirty="0"/>
+          </a:p>
+        </p:txBody>
+      </p:sp>
+      <p:sp>
+        <p:nvSpPr>
+          <p:cNvPr id="16" name="Row text"/>
           <p:cNvSpPr txBox="1"/>
           <p:nvPr/>
         </p:nvSpPr>
         <p:spPr>
           <a:xfrm>
-            <a:off x="9212351" y="2697480"/>
-            <a:ext cx="2293544" cy="612648"/>
+            <a:off x="1325880" y="4379976"/>
+            <a:ext cx="10317175" cy="841248"/>
           </a:xfrm>
           <a:prstGeom prst="rect">
             <a:avLst/>
@@ -16844,34 +17258,98 @@
           <a:ln/>
         </p:spPr>
         <p:txBody>
-          <a:bodyPr wrap="square" lIns="0" tIns="0" rIns="0" bIns="0" rtlCol="0" anchor="t"/>
+          <a:bodyPr wrap="square" lIns="0" tIns="0" rIns="0" bIns="0" rtlCol="0" anchor="ctr"/>
+          <a:lstStyle/>
+          <a:p>
+            <a:pPr indent="0" marL="0">
+              <a:buNone/>
+            </a:pPr>
+            <a:r>
+              <a:rPr lang="en-US" sz="1500" dirty="0">
+                <a:solidFill>
+                  <a:schemeClr val="tx1"/>
+                </a:solidFill>
+              </a:rPr>
+              <a:t>A commitment over many reviews is a joint chance constraint, whose chance lies between the worst review's and the sum. Quantile forms are exact and CVaR is convex and safe. Information never hurts, and the clairvoyant bounds what any of it is worth.</a:t>
+            </a:r>
+            <a:endParaRPr lang="en-US" sz="1500" dirty="0"/>
+          </a:p>
+        </p:txBody>
+      </p:sp>
+      <p:sp>
+        <p:nvSpPr>
+          <p:cNvPr id="17" name="Number"/>
+          <p:cNvSpPr/>
+          <p:nvPr/>
+        </p:nvSpPr>
+        <p:spPr>
+          <a:xfrm>
+            <a:off x="548640" y="5321808"/>
+            <a:ext cx="566928" cy="566928"/>
+          </a:xfrm>
+          <a:prstGeom prst="ellipse">
+            <a:avLst/>
+          </a:prstGeom>
+          <a:solidFill>
+            <a:schemeClr val="accent1"/>
+          </a:solidFill>
+          <a:ln w="6350">
+            <a:solidFill>
+              <a:schemeClr val="accent1"/>
+            </a:solidFill>
+            <a:prstDash val="solid"/>
+          </a:ln>
+        </p:spPr>
+      </p:sp>
+      <p:sp>
+        <p:nvSpPr>
+          <p:cNvPr id="18" name="Text 15"/>
+          <p:cNvSpPr txBox="1"/>
+          <p:nvPr/>
+        </p:nvSpPr>
+        <p:spPr>
+          <a:xfrm>
+            <a:off x="548640" y="5321808"/>
+            <a:ext cx="566928" cy="566928"/>
+          </a:xfrm>
+          <a:prstGeom prst="rect">
+            <a:avLst/>
+          </a:prstGeom>
+          <a:noFill/>
+          <a:ln/>
+        </p:spPr>
+        <p:txBody>
+          <a:bodyPr wrap="square" lIns="0" tIns="0" rIns="0" bIns="0" rtlCol="0" anchor="ctr"/>
           <a:lstStyle/>
           <a:p>
             <a:pPr algn="ctr" indent="0" marL="0">
               <a:buNone/>
             </a:pPr>
             <a:r>
-              <a:rPr lang="en-US" sz="1400" dirty="0">
-                <a:solidFill>
-                  <a:schemeClr val="tx2"/>
-                </a:solidFill>
-              </a:rPr>
-              <a:t>AXIOM Lab 2.9</a:t>
-            </a:r>
-            <a:endParaRPr lang="en-US" sz="1400" dirty="0"/>
-          </a:p>
-        </p:txBody>
-      </p:sp>
-      <p:sp>
-        <p:nvSpPr>
-          <p:cNvPr id="17" name="Bullets"/>
+              <a:rPr lang="en-US" sz="1500" b="1" dirty="0">
+                <a:solidFill>
+                  <a:schemeClr val="bg1"/>
+                </a:solidFill>
+                <a:latin typeface="Calibri" pitchFamily="34" charset="0"/>
+                <a:ea typeface="Calibri" pitchFamily="34" charset="-122"/>
+                <a:cs typeface="Calibri" pitchFamily="34" charset="-120"/>
+              </a:rPr>
+              <a:t>5</a:t>
+            </a:r>
+            <a:endParaRPr lang="en-US" sz="1500" dirty="0"/>
+          </a:p>
+        </p:txBody>
+      </p:sp>
+      <p:sp>
+        <p:nvSpPr>
+          <p:cNvPr id="19" name="Row text"/>
           <p:cNvSpPr txBox="1"/>
           <p:nvPr/>
         </p:nvSpPr>
         <p:spPr>
           <a:xfrm>
-            <a:off x="548640" y="3703320"/>
-            <a:ext cx="11094415" cy="2468880"/>
+            <a:off x="1325880" y="5276088"/>
+            <a:ext cx="10317175" cy="841248"/>
           </a:xfrm>
           <a:prstGeom prst="rect">
             <a:avLst/>
@@ -16880,59 +17358,21 @@
           <a:ln/>
         </p:spPr>
         <p:txBody>
-          <a:bodyPr wrap="square" lIns="635" tIns="635" rIns="635" bIns="635" rtlCol="0" anchor="t"/>
-          <a:lstStyle/>
-          <a:p>
-            <a:pPr marL="228600" indent="-228600">
-              <a:spcAft>
-                <a:spcPts val="800"/>
-              </a:spcAft>
-              <a:buSzPct val="100000"/>
-              <a:buChar char="•"/>
-            </a:pPr>
-            <a:r>
-              <a:rPr lang="en-US" sz="1700" b="1" dirty="0">
+          <a:bodyPr wrap="square" lIns="0" tIns="0" rIns="0" bIns="0" rtlCol="0" anchor="ctr"/>
+          <a:lstStyle/>
+          <a:p>
+            <a:pPr indent="0" marL="0">
+              <a:buNone/>
+            </a:pPr>
+            <a:r>
+              <a:rPr lang="en-US" sz="1500" dirty="0">
                 <a:solidFill>
                   <a:schemeClr val="tx1"/>
                 </a:solidFill>
               </a:rPr>
-              <a:t>Notebook</a:t>
-            </a:r>
-            <a:r>
-              <a:rPr lang="en-US" sz="1700" dirty="0">
-                <a:solidFill>
-                  <a:schemeClr val="tx1"/>
-                </a:solidFill>
-              </a:rPr>
-              <a:t> DCT_V2_Ch09_Lab.ipynb: Worked Example 9.1 and the lab's five steps in nine panels, on the book's paths and the fresh ones</a:t>
-            </a:r>
-            <a:endParaRPr lang="en-US" sz="1700" dirty="0"/>
-          </a:p>
-          <a:p>
-            <a:pPr marL="228600" indent="-228600">
-              <a:spcAft>
-                <a:spcPts val="800"/>
-              </a:spcAft>
-              <a:buSzPct val="100000"/>
-              <a:buChar char="•"/>
-            </a:pPr>
-            <a:r>
-              <a:rPr lang="en-US" sz="1700" b="1" dirty="0">
-                <a:solidFill>
-                  <a:schemeClr val="tx1"/>
-                </a:solidFill>
-              </a:rPr>
-              <a:t>Workbook</a:t>
-            </a:r>
-            <a:r>
-              <a:rPr lang="en-US" sz="1700" dirty="0">
-                <a:solidFill>
-                  <a:schemeClr val="tx1"/>
-                </a:solidFill>
-              </a:rPr>
-              <a:t> DCT_V2_Ch09_Lab.xlsx: the plan and Gaussian chances, every package's and rule's cost, the margin bounds, the warning's allotment, and the hiring loop, in formulas</a:t>
-            </a:r>
-            <a:endParaRPr lang="en-US" sz="1700" dirty="0"/>
+              <a:t>Answers computed from samples carry two errors, the estimate's and the design's. Sample average approximation is consistent but optimistic: judge an answer on fresh paths, with a margin priced by the sample's size.</a:t>
+            </a:r>
+            <a:endParaRPr lang="en-US" sz="1500" dirty="0"/>
           </a:p>
         </p:txBody>
       </p:sp>
@@ -17038,6 +17478,637 @@
                   <a:schemeClr val="accent1"/>
                 </a:solidFill>
               </a:rPr>
+              <a:t>THIS WEEK'S LABORATORY</a:t>
+            </a:r>
+            <a:endParaRPr lang="en-US" sz="1200" dirty="0"/>
+          </a:p>
+        </p:txBody>
+      </p:sp>
+      <p:sp>
+        <p:nvSpPr>
+          <p:cNvPr id="4" name="Text 1"/>
+          <p:cNvSpPr/>
+          <p:nvPr>
+            <p:ph idx="103" type="title" hasCustomPrompt="1"/>
+          </p:nvPr>
+        </p:nvSpPr>
+        <p:spPr>
+          <a:xfrm>
+            <a:off x="548640" y="658368"/>
+            <a:ext cx="11094415" cy="868680"/>
+          </a:xfrm>
+          <a:prstGeom prst="rect">
+            <a:avLst/>
+          </a:prstGeom>
+          <a:noFill/>
+          <a:ln/>
+        </p:spPr>
+        <p:txBody>
+          <a:bodyPr wrap="square" lIns="0" tIns="0" rIns="0" bIns="0" rtlCol="0" anchor="t"/>
+          <a:lstStyle/>
+          <a:p>
+            <a:pPr algn="l" indent="0" marL="0">
+              <a:buNone/>
+            </a:pPr>
+            <a:r>
+              <a:rPr lang="en-US" sz="3200" b="1" dirty="0">
+                <a:solidFill>
+                  <a:schemeClr val="tx1"/>
+                </a:solidFill>
+                <a:latin typeface="Cambria" pitchFamily="34" charset="0"/>
+                <a:ea typeface="Cambria" pitchFamily="34" charset="-122"/>
+                <a:cs typeface="Cambria" pitchFamily="34" charset="-120"/>
+              </a:rPr>
+              <a:t>Notebook and workbook reproduce the book</a:t>
+            </a:r>
+            <a:endParaRPr lang="en-US" sz="3200" dirty="0"/>
+          </a:p>
+        </p:txBody>
+      </p:sp>
+      <p:sp>
+        <p:nvSpPr>
+          <p:cNvPr id="5" name="Stat card"/>
+          <p:cNvSpPr/>
+          <p:nvPr/>
+        </p:nvSpPr>
+        <p:spPr>
+          <a:xfrm>
+            <a:off x="548640" y="1691640"/>
+            <a:ext cx="2567864" cy="1691640"/>
+          </a:xfrm>
+          <a:prstGeom prst="roundRect">
+            <a:avLst>
+              <a:gd name="adj" fmla="val 4324"/>
+            </a:avLst>
+          </a:prstGeom>
+          <a:solidFill>
+            <a:schemeClr val="tx1"/>
+          </a:solidFill>
+          <a:ln w="9525">
+            <a:solidFill>
+              <a:srgbClr val="0F1E3D"/>
+            </a:solidFill>
+            <a:prstDash val="solid"/>
+          </a:ln>
+        </p:spPr>
+      </p:sp>
+      <p:sp>
+        <p:nvSpPr>
+          <p:cNvPr id="6" name="Stat value"/>
+          <p:cNvSpPr txBox="1"/>
+          <p:nvPr/>
+        </p:nvSpPr>
+        <p:spPr>
+          <a:xfrm>
+            <a:off x="685800" y="1801368"/>
+            <a:ext cx="2293544" cy="914400"/>
+          </a:xfrm>
+          <a:prstGeom prst="rect">
+            <a:avLst/>
+          </a:prstGeom>
+          <a:noFill/>
+          <a:ln/>
+        </p:spPr>
+        <p:txBody>
+          <a:bodyPr wrap="square" lIns="0" tIns="0" rIns="0" bIns="0" rtlCol="0" anchor="ctr"/>
+          <a:lstStyle/>
+          <a:p>
+            <a:pPr algn="ctr" indent="0" marL="0">
+              <a:buNone/>
+            </a:pPr>
+            <a:r>
+              <a:rPr lang="en-US" sz="4400" b="1" dirty="0">
+                <a:solidFill>
+                  <a:schemeClr val="accent1"/>
+                </a:solidFill>
+                <a:latin typeface="Cambria" pitchFamily="34" charset="0"/>
+                <a:ea typeface="Cambria" pitchFamily="34" charset="-122"/>
+                <a:cs typeface="Cambria" pitchFamily="34" charset="-120"/>
+              </a:rPr>
+              <a:t>169</a:t>
+            </a:r>
+            <a:endParaRPr lang="en-US" sz="4400" dirty="0"/>
+          </a:p>
+        </p:txBody>
+      </p:sp>
+      <p:sp>
+        <p:nvSpPr>
+          <p:cNvPr id="7" name="Stat label"/>
+          <p:cNvSpPr txBox="1"/>
+          <p:nvPr/>
+        </p:nvSpPr>
+        <p:spPr>
+          <a:xfrm>
+            <a:off x="685800" y="2697480"/>
+            <a:ext cx="2293544" cy="612648"/>
+          </a:xfrm>
+          <a:prstGeom prst="rect">
+            <a:avLst/>
+          </a:prstGeom>
+          <a:noFill/>
+          <a:ln/>
+        </p:spPr>
+        <p:txBody>
+          <a:bodyPr wrap="square" lIns="0" tIns="0" rIns="0" bIns="0" rtlCol="0" anchor="t"/>
+          <a:lstStyle/>
+          <a:p>
+            <a:pPr algn="ctr" indent="0" marL="0">
+              <a:buNone/>
+            </a:pPr>
+            <a:r>
+              <a:rPr lang="en-US" sz="1400" dirty="0">
+                <a:solidFill>
+                  <a:schemeClr val="bg2"/>
+                </a:solidFill>
+              </a:rPr>
+              <a:t>notebook checkpoints, every one PASS</a:t>
+            </a:r>
+            <a:endParaRPr lang="en-US" sz="1400" dirty="0"/>
+          </a:p>
+        </p:txBody>
+      </p:sp>
+      <p:sp>
+        <p:nvSpPr>
+          <p:cNvPr id="8" name="Stat card"/>
+          <p:cNvSpPr/>
+          <p:nvPr/>
+        </p:nvSpPr>
+        <p:spPr>
+          <a:xfrm>
+            <a:off x="3390824" y="1691640"/>
+            <a:ext cx="2567864" cy="1691640"/>
+          </a:xfrm>
+          <a:prstGeom prst="roundRect">
+            <a:avLst>
+              <a:gd name="adj" fmla="val 4324"/>
+            </a:avLst>
+          </a:prstGeom>
+          <a:solidFill>
+            <a:schemeClr val="bg2"/>
+          </a:solidFill>
+          <a:ln w="9525">
+            <a:solidFill>
+              <a:srgbClr val="C4CBD8"/>
+            </a:solidFill>
+            <a:prstDash val="solid"/>
+          </a:ln>
+        </p:spPr>
+      </p:sp>
+      <p:sp>
+        <p:nvSpPr>
+          <p:cNvPr id="9" name="Stat value"/>
+          <p:cNvSpPr txBox="1"/>
+          <p:nvPr/>
+        </p:nvSpPr>
+        <p:spPr>
+          <a:xfrm>
+            <a:off x="3527984" y="1801368"/>
+            <a:ext cx="2293544" cy="914400"/>
+          </a:xfrm>
+          <a:prstGeom prst="rect">
+            <a:avLst/>
+          </a:prstGeom>
+          <a:noFill/>
+          <a:ln/>
+        </p:spPr>
+        <p:txBody>
+          <a:bodyPr wrap="square" lIns="0" tIns="0" rIns="0" bIns="0" rtlCol="0" anchor="ctr"/>
+          <a:lstStyle/>
+          <a:p>
+            <a:pPr algn="ctr" indent="0" marL="0">
+              <a:buNone/>
+            </a:pPr>
+            <a:r>
+              <a:rPr lang="en-US" sz="4400" b="1" dirty="0">
+                <a:solidFill>
+                  <a:schemeClr val="tx1"/>
+                </a:solidFill>
+                <a:latin typeface="Cambria" pitchFamily="34" charset="0"/>
+                <a:ea typeface="Cambria" pitchFamily="34" charset="-122"/>
+                <a:cs typeface="Cambria" pitchFamily="34" charset="-120"/>
+              </a:rPr>
+              <a:t>87</a:t>
+            </a:r>
+            <a:endParaRPr lang="en-US" sz="4400" dirty="0"/>
+          </a:p>
+        </p:txBody>
+      </p:sp>
+      <p:sp>
+        <p:nvSpPr>
+          <p:cNvPr id="10" name="Stat label"/>
+          <p:cNvSpPr txBox="1"/>
+          <p:nvPr/>
+        </p:nvSpPr>
+        <p:spPr>
+          <a:xfrm>
+            <a:off x="3527984" y="2697480"/>
+            <a:ext cx="2293544" cy="612648"/>
+          </a:xfrm>
+          <a:prstGeom prst="rect">
+            <a:avLst/>
+          </a:prstGeom>
+          <a:noFill/>
+          <a:ln/>
+        </p:spPr>
+        <p:txBody>
+          <a:bodyPr wrap="square" lIns="0" tIns="0" rIns="0" bIns="0" rtlCol="0" anchor="t"/>
+          <a:lstStyle/>
+          <a:p>
+            <a:pPr algn="ctr" indent="0" marL="0">
+              <a:buNone/>
+            </a:pPr>
+            <a:r>
+              <a:rPr lang="en-US" sz="1400" dirty="0">
+                <a:solidFill>
+                  <a:schemeClr val="tx2"/>
+                </a:solidFill>
+              </a:rPr>
+              <a:t>workbook checks against the engine, ALL PASS</a:t>
+            </a:r>
+            <a:endParaRPr lang="en-US" sz="1400" dirty="0"/>
+          </a:p>
+        </p:txBody>
+      </p:sp>
+      <p:sp>
+        <p:nvSpPr>
+          <p:cNvPr id="11" name="Stat card"/>
+          <p:cNvSpPr/>
+          <p:nvPr/>
+        </p:nvSpPr>
+        <p:spPr>
+          <a:xfrm>
+            <a:off x="6233008" y="1691640"/>
+            <a:ext cx="2567864" cy="1691640"/>
+          </a:xfrm>
+          <a:prstGeom prst="roundRect">
+            <a:avLst>
+              <a:gd name="adj" fmla="val 4324"/>
+            </a:avLst>
+          </a:prstGeom>
+          <a:solidFill>
+            <a:schemeClr val="bg2"/>
+          </a:solidFill>
+          <a:ln w="9525">
+            <a:solidFill>
+              <a:srgbClr val="C4CBD8"/>
+            </a:solidFill>
+            <a:prstDash val="solid"/>
+          </a:ln>
+        </p:spPr>
+      </p:sp>
+      <p:sp>
+        <p:nvSpPr>
+          <p:cNvPr id="12" name="Stat value"/>
+          <p:cNvSpPr txBox="1"/>
+          <p:nvPr/>
+        </p:nvSpPr>
+        <p:spPr>
+          <a:xfrm>
+            <a:off x="6370168" y="1801368"/>
+            <a:ext cx="2293544" cy="914400"/>
+          </a:xfrm>
+          <a:prstGeom prst="rect">
+            <a:avLst/>
+          </a:prstGeom>
+          <a:noFill/>
+          <a:ln/>
+        </p:spPr>
+        <p:txBody>
+          <a:bodyPr wrap="square" lIns="0" tIns="0" rIns="0" bIns="0" rtlCol="0" anchor="ctr"/>
+          <a:lstStyle/>
+          <a:p>
+            <a:pPr algn="ctr" indent="0" marL="0">
+              <a:buNone/>
+            </a:pPr>
+            <a:r>
+              <a:rPr lang="en-US" sz="4400" b="1" dirty="0">
+                <a:solidFill>
+                  <a:schemeClr val="tx1"/>
+                </a:solidFill>
+                <a:latin typeface="Cambria" pitchFamily="34" charset="0"/>
+                <a:ea typeface="Cambria" pitchFamily="34" charset="-122"/>
+                <a:cs typeface="Cambria" pitchFamily="34" charset="-120"/>
+              </a:rPr>
+              <a:t>26209</a:t>
+            </a:r>
+            <a:endParaRPr lang="en-US" sz="4400" dirty="0"/>
+          </a:p>
+        </p:txBody>
+      </p:sp>
+      <p:sp>
+        <p:nvSpPr>
+          <p:cNvPr id="13" name="Stat label"/>
+          <p:cNvSpPr txBox="1"/>
+          <p:nvPr/>
+        </p:nvSpPr>
+        <p:spPr>
+          <a:xfrm>
+            <a:off x="6370168" y="2697480"/>
+            <a:ext cx="2293544" cy="612648"/>
+          </a:xfrm>
+          <a:prstGeom prst="rect">
+            <a:avLst/>
+          </a:prstGeom>
+          <a:noFill/>
+          <a:ln/>
+        </p:spPr>
+        <p:txBody>
+          <a:bodyPr wrap="square" lIns="0" tIns="0" rIns="0" bIns="0" rtlCol="0" anchor="t"/>
+          <a:lstStyle/>
+          <a:p>
+            <a:pPr algn="ctr" indent="0" marL="0">
+              <a:buNone/>
+            </a:pPr>
+            <a:r>
+              <a:rPr lang="en-US" sz="1400" dirty="0">
+                <a:solidFill>
+                  <a:schemeClr val="tx2"/>
+                </a:solidFill>
+              </a:rPr>
+              <a:t>the lab's seed</a:t>
+            </a:r>
+            <a:endParaRPr lang="en-US" sz="1400" dirty="0"/>
+          </a:p>
+        </p:txBody>
+      </p:sp>
+      <p:sp>
+        <p:nvSpPr>
+          <p:cNvPr id="14" name="Stat card"/>
+          <p:cNvSpPr/>
+          <p:nvPr/>
+        </p:nvSpPr>
+        <p:spPr>
+          <a:xfrm>
+            <a:off x="9075191" y="1691640"/>
+            <a:ext cx="2567864" cy="1691640"/>
+          </a:xfrm>
+          <a:prstGeom prst="roundRect">
+            <a:avLst>
+              <a:gd name="adj" fmla="val 4324"/>
+            </a:avLst>
+          </a:prstGeom>
+          <a:solidFill>
+            <a:schemeClr val="bg2"/>
+          </a:solidFill>
+          <a:ln w="9525">
+            <a:solidFill>
+              <a:srgbClr val="C4CBD8"/>
+            </a:solidFill>
+            <a:prstDash val="solid"/>
+          </a:ln>
+        </p:spPr>
+      </p:sp>
+      <p:sp>
+        <p:nvSpPr>
+          <p:cNvPr id="15" name="Stat value"/>
+          <p:cNvSpPr txBox="1"/>
+          <p:nvPr/>
+        </p:nvSpPr>
+        <p:spPr>
+          <a:xfrm>
+            <a:off x="9212351" y="1801368"/>
+            <a:ext cx="2293544" cy="914400"/>
+          </a:xfrm>
+          <a:prstGeom prst="rect">
+            <a:avLst/>
+          </a:prstGeom>
+          <a:noFill/>
+          <a:ln/>
+        </p:spPr>
+        <p:txBody>
+          <a:bodyPr wrap="square" lIns="0" tIns="0" rIns="0" bIns="0" rtlCol="0" anchor="ctr"/>
+          <a:lstStyle/>
+          <a:p>
+            <a:pPr algn="ctr" indent="0" marL="0">
+              <a:buNone/>
+            </a:pPr>
+            <a:r>
+              <a:rPr lang="en-US" sz="3000" b="1" dirty="0">
+                <a:solidFill>
+                  <a:schemeClr val="tx1"/>
+                </a:solidFill>
+                <a:latin typeface="Cambria" pitchFamily="34" charset="0"/>
+                <a:ea typeface="Cambria" pitchFamily="34" charset="-122"/>
+                <a:cs typeface="Cambria" pitchFamily="34" charset="-120"/>
+              </a:rPr>
+              <a:t>AXIOM-09</a:t>
+            </a:r>
+            <a:endParaRPr lang="en-US" sz="3000" dirty="0"/>
+          </a:p>
+        </p:txBody>
+      </p:sp>
+      <p:sp>
+        <p:nvSpPr>
+          <p:cNvPr id="16" name="Stat label"/>
+          <p:cNvSpPr txBox="1"/>
+          <p:nvPr/>
+        </p:nvSpPr>
+        <p:spPr>
+          <a:xfrm>
+            <a:off x="9212351" y="2697480"/>
+            <a:ext cx="2293544" cy="612648"/>
+          </a:xfrm>
+          <a:prstGeom prst="rect">
+            <a:avLst/>
+          </a:prstGeom>
+          <a:noFill/>
+          <a:ln/>
+        </p:spPr>
+        <p:txBody>
+          <a:bodyPr wrap="square" lIns="0" tIns="0" rIns="0" bIns="0" rtlCol="0" anchor="t"/>
+          <a:lstStyle/>
+          <a:p>
+            <a:pPr algn="ctr" indent="0" marL="0">
+              <a:buNone/>
+            </a:pPr>
+            <a:r>
+              <a:rPr lang="en-US" sz="1400" dirty="0">
+                <a:solidFill>
+                  <a:schemeClr val="tx2"/>
+                </a:solidFill>
+              </a:rPr>
+              <a:t>AXIOM Lab 2.9</a:t>
+            </a:r>
+            <a:endParaRPr lang="en-US" sz="1400" dirty="0"/>
+          </a:p>
+        </p:txBody>
+      </p:sp>
+      <p:sp>
+        <p:nvSpPr>
+          <p:cNvPr id="17" name="Bullets"/>
+          <p:cNvSpPr txBox="1"/>
+          <p:nvPr/>
+        </p:nvSpPr>
+        <p:spPr>
+          <a:xfrm>
+            <a:off x="548640" y="3703320"/>
+            <a:ext cx="11094415" cy="2468880"/>
+          </a:xfrm>
+          <a:prstGeom prst="rect">
+            <a:avLst/>
+          </a:prstGeom>
+          <a:noFill/>
+          <a:ln/>
+        </p:spPr>
+        <p:txBody>
+          <a:bodyPr wrap="square" lIns="635" tIns="635" rIns="635" bIns="635" rtlCol="0" anchor="t"/>
+          <a:lstStyle/>
+          <a:p>
+            <a:pPr marL="228600" indent="-228600">
+              <a:spcAft>
+                <a:spcPts val="800"/>
+              </a:spcAft>
+              <a:buSzPct val="100000"/>
+              <a:buChar char="•"/>
+            </a:pPr>
+            <a:r>
+              <a:rPr lang="en-US" sz="1700" b="1" dirty="0">
+                <a:solidFill>
+                  <a:schemeClr val="tx1"/>
+                </a:solidFill>
+              </a:rPr>
+              <a:t>Notebook</a:t>
+            </a:r>
+            <a:r>
+              <a:rPr lang="en-US" sz="1700" dirty="0">
+                <a:solidFill>
+                  <a:schemeClr val="tx1"/>
+                </a:solidFill>
+              </a:rPr>
+              <a:t> DCT_V2_Ch09_Lab.ipynb: Worked Example 9.1 and the lab's five steps in nine panels, on the book's paths and the fresh ones</a:t>
+            </a:r>
+            <a:endParaRPr lang="en-US" sz="1700" dirty="0"/>
+          </a:p>
+          <a:p>
+            <a:pPr marL="228600" indent="-228600">
+              <a:spcAft>
+                <a:spcPts val="800"/>
+              </a:spcAft>
+              <a:buSzPct val="100000"/>
+              <a:buChar char="•"/>
+            </a:pPr>
+            <a:r>
+              <a:rPr lang="en-US" sz="1700" b="1" dirty="0">
+                <a:solidFill>
+                  <a:schemeClr val="tx1"/>
+                </a:solidFill>
+              </a:rPr>
+              <a:t>Workbook</a:t>
+            </a:r>
+            <a:r>
+              <a:rPr lang="en-US" sz="1700" dirty="0">
+                <a:solidFill>
+                  <a:schemeClr val="tx1"/>
+                </a:solidFill>
+              </a:rPr>
+              <a:t> DCT_V2_Ch09_Lab.xlsx: the plan and Gaussian chances, every package's and rule's cost, the margin bounds, the warning's allotment, and the hiring loop, in formulas</a:t>
+            </a:r>
+            <a:endParaRPr lang="en-US" sz="1700" dirty="0"/>
+          </a:p>
+        </p:txBody>
+      </p:sp>
+      <p:sp>
+        <p:nvSpPr>
+          <p:cNvPr id="25" name="Slide Number Placeholder 0"/>
+          <p:cNvSpPr>
+            <a:spLocks noGrp="1"/>
+          </p:cNvSpPr>
+          <p:nvPr>
+            <p:ph type="sldNum" sz="quarter" idx="4294967295"/>
+          </p:nvPr>
+        </p:nvSpPr>
+        <p:spPr>
+          <a:xfrm>
+            <a:off x="11094415" y="6382512"/>
+            <a:ext cx="548640" cy="237744"/>
+          </a:xfrm>
+          <a:prstGeom prst="rect">
+            <a:avLst/>
+          </a:prstGeom>
+          <a:extLst>
+            <a:ext uri="{C572A759-6A51-4108-AA02-DFA0A04FC94B}">
+              <ma14:wrappingTextBoxFlag xmlns:ma14="http://schemas.microsoft.com/office/mac/drawingml/2011/main" val="0"/>
+            </a:ext>
+          </a:extLst>
+        </p:spPr>
+        <p:txBody>
+          <a:bodyPr/>
+          <a:lstStyle>
+            <a:lvl1pPr>
+              <a:defRPr sz="1000">
+                <a:solidFill>
+                  <a:srgbClr val="5A6B82"/>
+                </a:solidFill>
+              </a:defRPr>
+            </a:lvl1pPr>
+          </a:lstStyle>
+          <a:p>
+            <a:pPr algn="r"/>
+            <a:fld id="{F7021451-1387-4CA6-816F-3879F97B5CBC}" type="slidenum">
+              <a:rPr b="0" lang="en-US"/>
+              <a:t>23</a:t>
+            </a:fld>
+            <a:endParaRPr lang="en-US"/>
+          </a:p>
+        </p:txBody>
+      </p:sp>
+    </p:spTree>
+  </p:cSld>
+  <p:clrMapOvr>
+    <a:masterClrMapping/>
+  </p:clrMapOvr>
+</p:sld>
+</file>
+
+<file path=ppt/slides/slide24.xml><?xml version="1.0" encoding="utf-8"?>
+<p:sld xmlns:a="http://schemas.openxmlformats.org/drawingml/2006/main" xmlns:r="http://schemas.openxmlformats.org/officeDocument/2006/relationships" xmlns:p="http://schemas.openxmlformats.org/presentationml/2006/main">
+  <p:cSld name="Slide 24">
+    <p:spTree>
+      <p:nvGrpSpPr>
+        <p:cNvPr id="1" name=""/>
+        <p:cNvGrpSpPr/>
+        <p:nvPr/>
+      </p:nvGrpSpPr>
+      <p:grpSpPr>
+        <a:xfrm>
+          <a:off x="0" y="0"/>
+          <a:ext cx="0" cy="0"/>
+          <a:chOff x="0" y="0"/>
+          <a:chExt cx="0" cy="0"/>
+        </a:xfrm>
+      </p:grpSpPr>
+      <p:sp>
+        <p:nvSpPr>
+          <p:cNvPr id="3" name="Text 1"/>
+          <p:cNvSpPr/>
+          <p:nvPr>
+            <p:ph idx="102" type="body" hasCustomPrompt="1"/>
+          </p:nvPr>
+        </p:nvSpPr>
+        <p:spPr>
+          <a:xfrm>
+            <a:off x="548640" y="347472"/>
+            <a:ext cx="11094415" cy="292608"/>
+          </a:xfrm>
+          <a:prstGeom prst="rect">
+            <a:avLst/>
+          </a:prstGeom>
+          <a:noFill/>
+          <a:ln/>
+        </p:spPr>
+        <p:txBody>
+          <a:bodyPr wrap="square" lIns="0" tIns="0" rIns="0" bIns="0" rtlCol="0"/>
+          <a:lstStyle/>
+          <a:p>
+            <a:pPr indent="0" marL="0">
+              <a:buNone/>
+            </a:pPr>
+            <a:r>
+              <a:rPr lang="en-US" sz="1200" b="1" spc="200" kern="0" dirty="0">
+                <a:solidFill>
+                  <a:schemeClr val="accent1"/>
+                </a:solidFill>
+              </a:rPr>
               <a:t>NEXT · CHAPTER 10</a:t>
             </a:r>
             <a:endParaRPr lang="en-US" sz="1200" dirty="0"/>
@@ -17224,7 +18295,7 @@
             <a:pPr algn="r"/>
             <a:fld id="{F7021451-1387-4CA6-816F-3879F97B5CBC}" type="slidenum">
               <a:rPr b="0" lang="en-US"/>
-              <a:t>23</a:t>
+              <a:t>24</a:t>
             </a:fld>
             <a:endParaRPr lang="en-US"/>
           </a:p>
@@ -17977,7 +19048,7 @@
                 <a:ea typeface="Cambria" pitchFamily="34" charset="-122"/>
                 <a:cs typeface="Cambria" pitchFamily="34" charset="-120"/>
               </a:rPr>
-              <a:t>Six sections, a worked example and a lab</a:t>
+              <a:t>Six sections, a worked example, a case and a lab</a:t>
             </a:r>
             <a:endParaRPr lang="en-US" sz="3200" dirty="0"/>
           </a:p>
@@ -17992,11 +19063,11 @@
         <p:spPr>
           <a:xfrm>
             <a:off x="548640" y="1691640"/>
-            <a:ext cx="2567864" cy="2103120"/>
+            <a:ext cx="1999427" cy="2103120"/>
           </a:xfrm>
           <a:prstGeom prst="roundRect">
             <a:avLst>
-              <a:gd name="adj" fmla="val 3478"/>
+              <a:gd name="adj" fmla="val 3659"/>
             </a:avLst>
           </a:prstGeom>
           <a:solidFill>
@@ -18019,7 +19090,7 @@
         <p:spPr>
           <a:xfrm>
             <a:off x="731520" y="1819656"/>
-            <a:ext cx="2202104" cy="310896"/>
+            <a:ext cx="1633667" cy="310896"/>
           </a:xfrm>
           <a:prstGeom prst="rect">
             <a:avLst/>
@@ -18055,7 +19126,7 @@
         <p:spPr>
           <a:xfrm>
             <a:off x="731520" y="2148840"/>
-            <a:ext cx="2202104" cy="1060704"/>
+            <a:ext cx="1633667" cy="1060704"/>
           </a:xfrm>
           <a:prstGeom prst="rect">
             <a:avLst/>
@@ -18071,7 +19142,7 @@
               <a:buNone/>
             </a:pPr>
             <a:r>
-              <a:rPr lang="en-US" sz="1500" b="1" dirty="0">
+              <a:rPr lang="en-US" sz="1300" b="1" dirty="0">
                 <a:solidFill>
                   <a:schemeClr val="tx1"/>
                 </a:solidFill>
@@ -18081,7 +19152,7 @@
               </a:rPr>
               <a:t>From One Future to a Declared Law</a:t>
             </a:r>
-            <a:endParaRPr lang="en-US" sz="1500" dirty="0"/>
+            <a:endParaRPr lang="en-US" sz="1300" dirty="0"/>
           </a:p>
         </p:txBody>
       </p:sp>
@@ -18094,7 +19165,7 @@
         <p:spPr>
           <a:xfrm>
             <a:off x="731520" y="3282696"/>
-            <a:ext cx="2202104" cy="384048"/>
+            <a:ext cx="1633667" cy="384048"/>
           </a:xfrm>
           <a:prstGeom prst="rect">
             <a:avLst/>
@@ -18110,14 +19181,14 @@
               <a:buNone/>
             </a:pPr>
             <a:r>
-              <a:rPr lang="en-US" sz="1300" dirty="0">
+              <a:rPr lang="en-US" sz="1200" dirty="0">
                 <a:solidFill>
                   <a:schemeClr val="tx2"/>
                 </a:solidFill>
               </a:rPr>
               <a:t>Definition 9.1 · Table 9.1</a:t>
             </a:r>
-            <a:endParaRPr lang="en-US" sz="1300" dirty="0"/>
+            <a:endParaRPr lang="en-US" sz="1200" dirty="0"/>
           </a:p>
         </p:txBody>
       </p:sp>
@@ -18129,12 +19200,12 @@
         </p:nvSpPr>
         <p:spPr>
           <a:xfrm>
-            <a:off x="3390824" y="1691640"/>
-            <a:ext cx="2567864" cy="2103120"/>
+            <a:off x="2822387" y="1691640"/>
+            <a:ext cx="1999427" cy="2103120"/>
           </a:xfrm>
           <a:prstGeom prst="roundRect">
             <a:avLst>
-              <a:gd name="adj" fmla="val 3478"/>
+              <a:gd name="adj" fmla="val 3659"/>
             </a:avLst>
           </a:prstGeom>
           <a:solidFill>
@@ -18156,8 +19227,8 @@
         </p:nvSpPr>
         <p:spPr>
           <a:xfrm>
-            <a:off x="3573704" y="1819656"/>
-            <a:ext cx="2202104" cy="310896"/>
+            <a:off x="3005267" y="1819656"/>
+            <a:ext cx="1633667" cy="310896"/>
           </a:xfrm>
           <a:prstGeom prst="rect">
             <a:avLst/>
@@ -18192,8 +19263,8 @@
         </p:nvSpPr>
         <p:spPr>
           <a:xfrm>
-            <a:off x="3573704" y="2148840"/>
-            <a:ext cx="2202104" cy="1060704"/>
+            <a:off x="3005267" y="2148840"/>
+            <a:ext cx="1633667" cy="1060704"/>
           </a:xfrm>
           <a:prstGeom prst="rect">
             <a:avLst/>
@@ -18209,7 +19280,7 @@
               <a:buNone/>
             </a:pPr>
             <a:r>
-              <a:rPr lang="en-US" sz="1500" b="1" dirty="0">
+              <a:rPr lang="en-US" sz="1300" b="1" dirty="0">
                 <a:solidFill>
                   <a:schemeClr val="tx1"/>
                 </a:solidFill>
@@ -18219,7 +19290,7 @@
               </a:rPr>
               <a:t>The Stochastic HJB Equation</a:t>
             </a:r>
-            <a:endParaRPr lang="en-US" sz="1500" dirty="0"/>
+            <a:endParaRPr lang="en-US" sz="1300" dirty="0"/>
           </a:p>
         </p:txBody>
       </p:sp>
@@ -18231,8 +19302,8 @@
         </p:nvSpPr>
         <p:spPr>
           <a:xfrm>
-            <a:off x="3573704" y="3282696"/>
-            <a:ext cx="2202104" cy="384048"/>
+            <a:off x="3005267" y="3282696"/>
+            <a:ext cx="1633667" cy="384048"/>
           </a:xfrm>
           <a:prstGeom prst="rect">
             <a:avLst/>
@@ -18248,14 +19319,14 @@
               <a:buNone/>
             </a:pPr>
             <a:r>
-              <a:rPr lang="en-US" sz="1300" dirty="0">
+              <a:rPr lang="en-US" sz="1200" dirty="0">
                 <a:solidFill>
                   <a:schemeClr val="tx2"/>
                 </a:solidFill>
               </a:rPr>
               <a:t>Theorem 9.1</a:t>
             </a:r>
-            <a:endParaRPr lang="en-US" sz="1300" dirty="0"/>
+            <a:endParaRPr lang="en-US" sz="1200" dirty="0"/>
           </a:p>
         </p:txBody>
       </p:sp>
@@ -18267,12 +19338,12 @@
         </p:nvSpPr>
         <p:spPr>
           <a:xfrm>
-            <a:off x="6233008" y="1691640"/>
-            <a:ext cx="2567864" cy="2103120"/>
+            <a:off x="5096134" y="1691640"/>
+            <a:ext cx="1999427" cy="2103120"/>
           </a:xfrm>
           <a:prstGeom prst="roundRect">
             <a:avLst>
-              <a:gd name="adj" fmla="val 3478"/>
+              <a:gd name="adj" fmla="val 3659"/>
             </a:avLst>
           </a:prstGeom>
           <a:solidFill>
@@ -18294,8 +19365,8 @@
         </p:nvSpPr>
         <p:spPr>
           <a:xfrm>
-            <a:off x="6415888" y="1819656"/>
-            <a:ext cx="2202104" cy="310896"/>
+            <a:off x="5279014" y="1819656"/>
+            <a:ext cx="1633667" cy="310896"/>
           </a:xfrm>
           <a:prstGeom prst="rect">
             <a:avLst/>
@@ -18330,8 +19401,8 @@
         </p:nvSpPr>
         <p:spPr>
           <a:xfrm>
-            <a:off x="6415888" y="2148840"/>
-            <a:ext cx="2202104" cy="1060704"/>
+            <a:off x="5279014" y="2148840"/>
+            <a:ext cx="1633667" cy="1060704"/>
           </a:xfrm>
           <a:prstGeom prst="rect">
             <a:avLst/>
@@ -18347,7 +19418,7 @@
               <a:buNone/>
             </a:pPr>
             <a:r>
-              <a:rPr lang="en-US" sz="1500" b="1" dirty="0">
+              <a:rPr lang="en-US" sz="1300" b="1" dirty="0">
                 <a:solidFill>
                   <a:schemeClr val="tx1"/>
                 </a:solidFill>
@@ -18357,7 +19428,7 @@
               </a:rPr>
               <a:t>What Outside Events Change in a Rule</a:t>
             </a:r>
-            <a:endParaRPr lang="en-US" sz="1500" dirty="0"/>
+            <a:endParaRPr lang="en-US" sz="1300" dirty="0"/>
           </a:p>
         </p:txBody>
       </p:sp>
@@ -18369,8 +19440,8 @@
         </p:nvSpPr>
         <p:spPr>
           <a:xfrm>
-            <a:off x="6415888" y="3282696"/>
-            <a:ext cx="2202104" cy="384048"/>
+            <a:off x="5279014" y="3282696"/>
+            <a:ext cx="1633667" cy="384048"/>
           </a:xfrm>
           <a:prstGeom prst="rect">
             <a:avLst/>
@@ -18386,14 +19457,14 @@
               <a:buNone/>
             </a:pPr>
             <a:r>
-              <a:rPr lang="en-US" sz="1300" dirty="0">
+              <a:rPr lang="en-US" sz="1200" dirty="0">
                 <a:solidFill>
                   <a:schemeClr val="tx2"/>
                 </a:solidFill>
               </a:rPr>
               <a:t>Theorem 9.2 · Proposition 9.1</a:t>
             </a:r>
-            <a:endParaRPr lang="en-US" sz="1300" dirty="0"/>
+            <a:endParaRPr lang="en-US" sz="1200" dirty="0"/>
           </a:p>
         </p:txBody>
       </p:sp>
@@ -18405,12 +19476,12 @@
         </p:nvSpPr>
         <p:spPr>
           <a:xfrm>
-            <a:off x="9075191" y="1691640"/>
-            <a:ext cx="2567864" cy="2103120"/>
+            <a:off x="7369881" y="1691640"/>
+            <a:ext cx="1999427" cy="2103120"/>
           </a:xfrm>
           <a:prstGeom prst="roundRect">
             <a:avLst>
-              <a:gd name="adj" fmla="val 3478"/>
+              <a:gd name="adj" fmla="val 3659"/>
             </a:avLst>
           </a:prstGeom>
           <a:solidFill>
@@ -18432,8 +19503,8 @@
         </p:nvSpPr>
         <p:spPr>
           <a:xfrm>
-            <a:off x="9258071" y="1819656"/>
-            <a:ext cx="2202104" cy="310896"/>
+            <a:off x="7552761" y="1819656"/>
+            <a:ext cx="1633667" cy="310896"/>
           </a:xfrm>
           <a:prstGeom prst="rect">
             <a:avLst/>
@@ -18468,8 +19539,8 @@
         </p:nvSpPr>
         <p:spPr>
           <a:xfrm>
-            <a:off x="9258071" y="2148840"/>
-            <a:ext cx="2202104" cy="1060704"/>
+            <a:off x="7552761" y="2148840"/>
+            <a:ext cx="1633667" cy="1060704"/>
           </a:xfrm>
           <a:prstGeom prst="rect">
             <a:avLst/>
@@ -18485,7 +19556,7 @@
               <a:buNone/>
             </a:pPr>
             <a:r>
-              <a:rPr lang="en-US" sz="1500" b="1" dirty="0">
+              <a:rPr lang="en-US" sz="1300" b="1" dirty="0">
                 <a:solidFill>
                   <a:schemeClr val="tx1"/>
                 </a:solidFill>
@@ -18495,7 +19566,7 @@
               </a:rPr>
               <a:t>Commitments Kept with a Stated Probability</a:t>
             </a:r>
-            <a:endParaRPr lang="en-US" sz="1500" dirty="0"/>
+            <a:endParaRPr lang="en-US" sz="1300" dirty="0"/>
           </a:p>
         </p:txBody>
       </p:sp>
@@ -18507,8 +19578,8 @@
         </p:nvSpPr>
         <p:spPr>
           <a:xfrm>
-            <a:off x="9258071" y="3282696"/>
-            <a:ext cx="2202104" cy="384048"/>
+            <a:off x="7552761" y="3282696"/>
+            <a:ext cx="1633667" cy="384048"/>
           </a:xfrm>
           <a:prstGeom prst="rect">
             <a:avLst/>
@@ -18524,14 +19595,14 @@
               <a:buNone/>
             </a:pPr>
             <a:r>
-              <a:rPr lang="en-US" sz="1300" dirty="0">
+              <a:rPr lang="en-US" sz="1200" dirty="0">
                 <a:solidFill>
                   <a:schemeClr val="tx2"/>
                 </a:solidFill>
               </a:rPr>
               <a:t>Proposition 9.2 · Figure 9.1</a:t>
             </a:r>
-            <a:endParaRPr lang="en-US" sz="1300" dirty="0"/>
+            <a:endParaRPr lang="en-US" sz="1200" dirty="0"/>
           </a:p>
         </p:txBody>
       </p:sp>
@@ -18543,12 +19614,12 @@
         </p:nvSpPr>
         <p:spPr>
           <a:xfrm>
-            <a:off x="548640" y="4069080"/>
-            <a:ext cx="2567864" cy="2103120"/>
+            <a:off x="9643628" y="1691640"/>
+            <a:ext cx="1999427" cy="2103120"/>
           </a:xfrm>
           <a:prstGeom prst="roundRect">
             <a:avLst>
-              <a:gd name="adj" fmla="val 3478"/>
+              <a:gd name="adj" fmla="val 3659"/>
             </a:avLst>
           </a:prstGeom>
           <a:solidFill>
@@ -18570,8 +19641,8 @@
         </p:nvSpPr>
         <p:spPr>
           <a:xfrm>
-            <a:off x="731520" y="4197096"/>
-            <a:ext cx="2202104" cy="310896"/>
+            <a:off x="9826508" y="1819656"/>
+            <a:ext cx="1633667" cy="310896"/>
           </a:xfrm>
           <a:prstGeom prst="rect">
             <a:avLst/>
@@ -18606,8 +19677,8 @@
         </p:nvSpPr>
         <p:spPr>
           <a:xfrm>
-            <a:off x="731520" y="4526280"/>
-            <a:ext cx="2202104" cy="1060704"/>
+            <a:off x="9826508" y="2148840"/>
+            <a:ext cx="1633667" cy="1060704"/>
           </a:xfrm>
           <a:prstGeom prst="rect">
             <a:avLst/>
@@ -18623,7 +19694,7 @@
               <a:buNone/>
             </a:pPr>
             <a:r>
-              <a:rPr lang="en-US" sz="1500" b="1" dirty="0">
+              <a:rPr lang="en-US" sz="1300" b="1" dirty="0">
                 <a:solidFill>
                   <a:schemeClr val="tx1"/>
                 </a:solidFill>
@@ -18633,7 +19704,7 @@
               </a:rPr>
               <a:t>Rules, Recourse, and the Value of Information</a:t>
             </a:r>
-            <a:endParaRPr lang="en-US" sz="1500" dirty="0"/>
+            <a:endParaRPr lang="en-US" sz="1300" dirty="0"/>
           </a:p>
         </p:txBody>
       </p:sp>
@@ -18645,8 +19716,8 @@
         </p:nvSpPr>
         <p:spPr>
           <a:xfrm>
-            <a:off x="731520" y="5660136"/>
-            <a:ext cx="2202104" cy="384048"/>
+            <a:off x="9826508" y="3282696"/>
+            <a:ext cx="1633667" cy="384048"/>
           </a:xfrm>
           <a:prstGeom prst="rect">
             <a:avLst/>
@@ -18662,14 +19733,14 @@
               <a:buNone/>
             </a:pPr>
             <a:r>
-              <a:rPr lang="en-US" sz="1300" dirty="0">
+              <a:rPr lang="en-US" sz="1200" dirty="0">
                 <a:solidFill>
                   <a:schemeClr val="tx2"/>
                 </a:solidFill>
               </a:rPr>
               <a:t>Proposition 9.3</a:t>
             </a:r>
-            <a:endParaRPr lang="en-US" sz="1300" dirty="0"/>
+            <a:endParaRPr lang="en-US" sz="1200" dirty="0"/>
           </a:p>
         </p:txBody>
       </p:sp>
@@ -18681,12 +19752,12 @@
         </p:nvSpPr>
         <p:spPr>
           <a:xfrm>
-            <a:off x="3390824" y="4069080"/>
-            <a:ext cx="2567864" cy="2103120"/>
+            <a:off x="548640" y="4069080"/>
+            <a:ext cx="1999427" cy="2103120"/>
           </a:xfrm>
           <a:prstGeom prst="roundRect">
             <a:avLst>
-              <a:gd name="adj" fmla="val 3478"/>
+              <a:gd name="adj" fmla="val 3659"/>
             </a:avLst>
           </a:prstGeom>
           <a:solidFill>
@@ -18708,8 +19779,8 @@
         </p:nvSpPr>
         <p:spPr>
           <a:xfrm>
-            <a:off x="3573704" y="4197096"/>
-            <a:ext cx="2202104" cy="310896"/>
+            <a:off x="731520" y="4197096"/>
+            <a:ext cx="1633667" cy="310896"/>
           </a:xfrm>
           <a:prstGeom prst="rect">
             <a:avLst/>
@@ -18744,8 +19815,8 @@
         </p:nvSpPr>
         <p:spPr>
           <a:xfrm>
-            <a:off x="3573704" y="4526280"/>
-            <a:ext cx="2202104" cy="1060704"/>
+            <a:off x="731520" y="4526280"/>
+            <a:ext cx="1633667" cy="1060704"/>
           </a:xfrm>
           <a:prstGeom prst="rect">
             <a:avLst/>
@@ -18761,7 +19832,7 @@
               <a:buNone/>
             </a:pPr>
             <a:r>
-              <a:rPr lang="en-US" sz="1500" b="1" dirty="0">
+              <a:rPr lang="en-US" sz="1300" b="1" dirty="0">
                 <a:solidFill>
                   <a:schemeClr val="tx1"/>
                 </a:solidFill>
@@ -18771,7 +19842,7 @@
               </a:rPr>
               <a:t>Computing with Samples</a:t>
             </a:r>
-            <a:endParaRPr lang="en-US" sz="1500" dirty="0"/>
+            <a:endParaRPr lang="en-US" sz="1300" dirty="0"/>
           </a:p>
         </p:txBody>
       </p:sp>
@@ -18783,8 +19854,8 @@
         </p:nvSpPr>
         <p:spPr>
           <a:xfrm>
-            <a:off x="3573704" y="5660136"/>
-            <a:ext cx="2202104" cy="384048"/>
+            <a:off x="731520" y="5660136"/>
+            <a:ext cx="1633667" cy="384048"/>
           </a:xfrm>
           <a:prstGeom prst="rect">
             <a:avLst/>
@@ -18800,14 +19871,14 @@
               <a:buNone/>
             </a:pPr>
             <a:r>
-              <a:rPr lang="en-US" sz="1300" dirty="0">
+              <a:rPr lang="en-US" sz="1200" dirty="0">
                 <a:solidFill>
                   <a:schemeClr val="tx2"/>
                 </a:solidFill>
               </a:rPr>
               <a:t>Theorem 9.3 · Table 9.2 · Figure 9.2</a:t>
             </a:r>
-            <a:endParaRPr lang="en-US" sz="1300" dirty="0"/>
+            <a:endParaRPr lang="en-US" sz="1200" dirty="0"/>
           </a:p>
         </p:txBody>
       </p:sp>
@@ -18819,12 +19890,12 @@
         </p:nvSpPr>
         <p:spPr>
           <a:xfrm>
-            <a:off x="6233008" y="4069080"/>
-            <a:ext cx="2567864" cy="2103120"/>
+            <a:off x="2822387" y="4069080"/>
+            <a:ext cx="1999427" cy="2103120"/>
           </a:xfrm>
           <a:prstGeom prst="roundRect">
             <a:avLst>
-              <a:gd name="adj" fmla="val 3478"/>
+              <a:gd name="adj" fmla="val 3659"/>
             </a:avLst>
           </a:prstGeom>
           <a:solidFill>
@@ -18846,8 +19917,8 @@
         </p:nvSpPr>
         <p:spPr>
           <a:xfrm>
-            <a:off x="6415888" y="4197096"/>
-            <a:ext cx="2202104" cy="310896"/>
+            <a:off x="3005267" y="4197096"/>
+            <a:ext cx="1633667" cy="310896"/>
           </a:xfrm>
           <a:prstGeom prst="rect">
             <a:avLst/>
@@ -18882,8 +19953,8 @@
         </p:nvSpPr>
         <p:spPr>
           <a:xfrm>
-            <a:off x="6415888" y="4526280"/>
-            <a:ext cx="2202104" cy="1060704"/>
+            <a:off x="3005267" y="4526280"/>
+            <a:ext cx="1633667" cy="1060704"/>
           </a:xfrm>
           <a:prstGeom prst="rect">
             <a:avLst/>
@@ -18899,7 +19970,7 @@
               <a:buNone/>
             </a:pPr>
             <a:r>
-              <a:rPr lang="en-US" sz="1500" b="1" dirty="0">
+              <a:rPr lang="en-US" sz="1300" b="1" dirty="0">
                 <a:solidFill>
                   <a:schemeClr val="bg1"/>
                 </a:solidFill>
@@ -18909,7 +19980,7 @@
               </a:rPr>
               <a:t>Can a Rule Replace the Committed Delay?</a:t>
             </a:r>
-            <a:endParaRPr lang="en-US" sz="1500" dirty="0"/>
+            <a:endParaRPr lang="en-US" sz="1300" dirty="0"/>
           </a:p>
         </p:txBody>
       </p:sp>
@@ -18921,8 +19992,8 @@
         </p:nvSpPr>
         <p:spPr>
           <a:xfrm>
-            <a:off x="6415888" y="5660136"/>
-            <a:ext cx="2202104" cy="384048"/>
+            <a:off x="3005267" y="5660136"/>
+            <a:ext cx="1633667" cy="384048"/>
           </a:xfrm>
           <a:prstGeom prst="rect">
             <a:avLst/>
@@ -18938,14 +20009,14 @@
               <a:buNone/>
             </a:pPr>
             <a:r>
-              <a:rPr lang="en-US" sz="1300" dirty="0">
+              <a:rPr lang="en-US" sz="1200" dirty="0">
                 <a:solidFill>
                   <a:schemeClr val="bg2"/>
                 </a:solidFill>
               </a:rPr>
               <a:t>Table 9.3 · Figure 9.3</a:t>
             </a:r>
-            <a:endParaRPr lang="en-US" sz="1300" dirty="0"/>
+            <a:endParaRPr lang="en-US" sz="1200" dirty="0"/>
           </a:p>
         </p:txBody>
       </p:sp>
@@ -18957,12 +20028,12 @@
         </p:nvSpPr>
         <p:spPr>
           <a:xfrm>
-            <a:off x="9075191" y="4069080"/>
-            <a:ext cx="2567864" cy="2103120"/>
+            <a:off x="5096134" y="4069080"/>
+            <a:ext cx="1999427" cy="2103120"/>
           </a:xfrm>
           <a:prstGeom prst="roundRect">
             <a:avLst>
-              <a:gd name="adj" fmla="val 3478"/>
+              <a:gd name="adj" fmla="val 3659"/>
             </a:avLst>
           </a:prstGeom>
           <a:solidFill>
@@ -18984,8 +20055,8 @@
         </p:nvSpPr>
         <p:spPr>
           <a:xfrm>
-            <a:off x="9258071" y="4197096"/>
-            <a:ext cx="2202104" cy="310896"/>
+            <a:off x="5279014" y="4197096"/>
+            <a:ext cx="1633667" cy="310896"/>
           </a:xfrm>
           <a:prstGeom prst="rect">
             <a:avLst/>
@@ -19006,7 +20077,7 @@
                   <a:schemeClr val="accent1"/>
                 </a:solidFill>
               </a:rPr>
-              <a:t>AXIOM Lab 2.9</a:t>
+              <a:t>In Practice</a:t>
             </a:r>
             <a:endParaRPr lang="en-US" sz="1300" dirty="0"/>
           </a:p>
@@ -19020,8 +20091,8 @@
         </p:nvSpPr>
         <p:spPr>
           <a:xfrm>
-            <a:off x="9258071" y="4526280"/>
-            <a:ext cx="2202104" cy="1060704"/>
+            <a:off x="5279014" y="4526280"/>
+            <a:ext cx="1633667" cy="1060704"/>
           </a:xfrm>
           <a:prstGeom prst="rect">
             <a:avLst/>
@@ -19037,7 +20108,7 @@
               <a:buNone/>
             </a:pPr>
             <a:r>
-              <a:rPr lang="en-US" sz="1500" b="1" dirty="0">
+              <a:rPr lang="en-US" sz="1300" b="1" dirty="0">
                 <a:solidFill>
                   <a:schemeClr val="tx1"/>
                 </a:solidFill>
@@ -19045,9 +20116,9 @@
                 <a:ea typeface="Cambria" pitchFamily="34" charset="-122"/>
                 <a:cs typeface="Cambria" pitchFamily="34" charset="-120"/>
               </a:rPr>
-              <a:t>Keeping Meridian's Appetite: Odds, Rules, and Samples</a:t>
-            </a:r>
-            <a:endParaRPr lang="en-US" sz="1500" dirty="0"/>
+              <a:t>Brazil Prices the Water in Its Reservoirs</a:t>
+            </a:r>
+            <a:endParaRPr lang="en-US" sz="1300" dirty="0"/>
           </a:p>
         </p:txBody>
       </p:sp>
@@ -19059,8 +20130,8 @@
         </p:nvSpPr>
         <p:spPr>
           <a:xfrm>
-            <a:off x="9258071" y="5660136"/>
-            <a:ext cx="2202104" cy="384048"/>
+            <a:off x="5279014" y="5660136"/>
+            <a:ext cx="1633667" cy="384048"/>
           </a:xfrm>
           <a:prstGeom prst="rect">
             <a:avLst/>
@@ -19076,14 +20147,152 @@
               <a:buNone/>
             </a:pPr>
             <a:r>
-              <a:rPr lang="en-US" sz="1300" dirty="0">
+              <a:rPr lang="en-US" sz="1200" dirty="0">
                 <a:solidFill>
                   <a:schemeClr val="tx2"/>
                 </a:solidFill>
               </a:rPr>
+              <a:t>At a Glance · board questions</a:t>
+            </a:r>
+            <a:endParaRPr lang="en-US" sz="1200" dirty="0"/>
+          </a:p>
+        </p:txBody>
+      </p:sp>
+      <p:sp>
+        <p:nvSpPr>
+          <p:cNvPr id="37" name="Card"/>
+          <p:cNvSpPr/>
+          <p:nvPr/>
+        </p:nvSpPr>
+        <p:spPr>
+          <a:xfrm>
+            <a:off x="7369881" y="4069080"/>
+            <a:ext cx="1999427" cy="2103120"/>
+          </a:xfrm>
+          <a:prstGeom prst="roundRect">
+            <a:avLst>
+              <a:gd name="adj" fmla="val 3659"/>
+            </a:avLst>
+          </a:prstGeom>
+          <a:solidFill>
+            <a:schemeClr val="bg2"/>
+          </a:solidFill>
+          <a:ln w="9525">
+            <a:solidFill>
+              <a:srgbClr val="C4CBD8"/>
+            </a:solidFill>
+            <a:prstDash val="solid"/>
+          </a:ln>
+        </p:spPr>
+      </p:sp>
+      <p:sp>
+        <p:nvSpPr>
+          <p:cNvPr id="38" name="Card label"/>
+          <p:cNvSpPr txBox="1"/>
+          <p:nvPr/>
+        </p:nvSpPr>
+        <p:spPr>
+          <a:xfrm>
+            <a:off x="7552761" y="4197096"/>
+            <a:ext cx="1633667" cy="310896"/>
+          </a:xfrm>
+          <a:prstGeom prst="rect">
+            <a:avLst/>
+          </a:prstGeom>
+          <a:noFill/>
+          <a:ln/>
+        </p:spPr>
+        <p:txBody>
+          <a:bodyPr wrap="square" lIns="0" tIns="0" rIns="0" bIns="0" rtlCol="0" anchor="ctr"/>
+          <a:lstStyle/>
+          <a:p>
+            <a:pPr indent="0" marL="0">
+              <a:buNone/>
+            </a:pPr>
+            <a:r>
+              <a:rPr lang="en-US" sz="1300" b="1" dirty="0">
+                <a:solidFill>
+                  <a:schemeClr val="accent1"/>
+                </a:solidFill>
+              </a:rPr>
+              <a:t>AXIOM Lab 2.9</a:t>
+            </a:r>
+            <a:endParaRPr lang="en-US" sz="1300" dirty="0"/>
+          </a:p>
+        </p:txBody>
+      </p:sp>
+      <p:sp>
+        <p:nvSpPr>
+          <p:cNvPr id="39" name="Card head"/>
+          <p:cNvSpPr txBox="1"/>
+          <p:nvPr/>
+        </p:nvSpPr>
+        <p:spPr>
+          <a:xfrm>
+            <a:off x="7552761" y="4526280"/>
+            <a:ext cx="1633667" cy="1060704"/>
+          </a:xfrm>
+          <a:prstGeom prst="rect">
+            <a:avLst/>
+          </a:prstGeom>
+          <a:noFill/>
+          <a:ln/>
+        </p:spPr>
+        <p:txBody>
+          <a:bodyPr wrap="square" lIns="0" tIns="0" rIns="0" bIns="0" rtlCol="0" anchor="t"/>
+          <a:lstStyle/>
+          <a:p>
+            <a:pPr indent="0" marL="0">
+              <a:buNone/>
+            </a:pPr>
+            <a:r>
+              <a:rPr lang="en-US" sz="1300" b="1" dirty="0">
+                <a:solidFill>
+                  <a:schemeClr val="tx1"/>
+                </a:solidFill>
+                <a:latin typeface="Cambria" pitchFamily="34" charset="0"/>
+                <a:ea typeface="Cambria" pitchFamily="34" charset="-122"/>
+                <a:cs typeface="Cambria" pitchFamily="34" charset="-120"/>
+              </a:rPr>
+              <a:t>Keeping Meridian's Appetite: Odds, Rules, and Samples</a:t>
+            </a:r>
+            <a:endParaRPr lang="en-US" sz="1300" dirty="0"/>
+          </a:p>
+        </p:txBody>
+      </p:sp>
+      <p:sp>
+        <p:nvSpPr>
+          <p:cNvPr id="40" name="Card text"/>
+          <p:cNvSpPr txBox="1"/>
+          <p:nvPr/>
+        </p:nvSpPr>
+        <p:spPr>
+          <a:xfrm>
+            <a:off x="7552761" y="5660136"/>
+            <a:ext cx="1633667" cy="384048"/>
+          </a:xfrm>
+          <a:prstGeom prst="rect">
+            <a:avLst/>
+          </a:prstGeom>
+          <a:noFill/>
+          <a:ln/>
+        </p:spPr>
+        <p:txBody>
+          <a:bodyPr wrap="square" lIns="0" tIns="0" rIns="0" bIns="0" rtlCol="0" anchor="t"/>
+          <a:lstStyle/>
+          <a:p>
+            <a:pPr indent="0" marL="0">
+              <a:buNone/>
+            </a:pPr>
+            <a:r>
+              <a:rPr lang="en-US" sz="1200" dirty="0">
+                <a:solidFill>
+                  <a:schemeClr val="tx2"/>
+                </a:solidFill>
+              </a:rPr>
               <a:t>AXIOM-09 · five steps</a:t>
             </a:r>
-            <a:endParaRPr lang="en-US" sz="1300" dirty="0"/>
+            <a:endParaRPr lang="en-US" sz="1200" dirty="0"/>
           </a:p>
         </p:txBody>
       </p:sp>
